--- a/PPTs/01_ExpressJS_Routing_HTTP_Methods_Middleware.pptx
+++ b/PPTs/01_ExpressJS_Routing_HTTP_Methods_Middleware.pptx
@@ -12,6 +12,7 @@
     <p:sldId id="260" r:id="rId11"/>
     <p:sldId id="261" r:id="rId12"/>
     <p:sldId id="262" r:id="rId13"/>
+    <p:sldId id="263" r:id="rId14"/>
   </p:sldIdLst>
   <p:sldSz cx="12191695" cy="6858000" type="screen4x3"/>
   <p:notesSz cx="6858000" cy="9144000"/>
@@ -3096,23 +3097,114 @@
       <p:grpSpPr/>
       <p:sp>
         <p:nvSpPr>
-          <p:cNvPr id="2" name="Title 1"/>
-          <p:cNvSpPr>
-            <a:spLocks noGrp="1"/>
-          </p:cNvSpPr>
-          <p:nvPr>
-            <p:ph type="ctrTitle"/>
-          </p:nvPr>
-        </p:nvSpPr>
-        <p:spPr/>
-        <p:txBody>
-          <a:bodyPr/>
-          <a:lstStyle/>
-          <a:p>
-            <a:pPr>
-              <a:defRPr sz="2800"/>
+          <p:cNvPr id="2" name="Rectangle 1"/>
+          <p:cNvSpPr/>
+          <p:nvPr/>
+        </p:nvSpPr>
+        <p:spPr>
+          <a:xfrm>
+            <a:off x="0" y="0"/>
+            <a:ext cx="12191695" cy="6858000"/>
+          </a:xfrm>
+          <a:prstGeom prst="rect">
+            <a:avLst/>
+          </a:prstGeom>
+          <a:solidFill>
+            <a:srgbClr val="E8F1FC"/>
+          </a:solidFill>
+          <a:ln>
+            <a:noFill/>
+          </a:ln>
+        </p:spPr>
+        <p:style>
+          <a:lnRef idx="1">
+            <a:schemeClr val="accent1"/>
+          </a:lnRef>
+          <a:fillRef idx="3">
+            <a:schemeClr val="accent1"/>
+          </a:fillRef>
+          <a:effectRef idx="2">
+            <a:schemeClr val="accent1"/>
+          </a:effectRef>
+          <a:fontRef idx="minor">
+            <a:schemeClr val="lt1"/>
+          </a:fontRef>
+        </p:style>
+        <p:txBody>
+          <a:bodyPr rtlCol="0" anchor="ctr"/>
+          <a:lstStyle/>
+          <a:p>
+            <a:pPr algn="ctr"/>
+          </a:p>
+        </p:txBody>
+      </p:sp>
+      <p:sp>
+        <p:nvSpPr>
+          <p:cNvPr id="3" name="TextBox 2"/>
+          <p:cNvSpPr txBox="1"/>
+          <p:nvPr/>
+        </p:nvSpPr>
+        <p:spPr>
+          <a:xfrm>
+            <a:off x="731520" y="914400"/>
+            <a:ext cx="10698480" cy="411480"/>
+          </a:xfrm>
+          <a:prstGeom prst="rect">
+            <a:avLst/>
+          </a:prstGeom>
+          <a:noFill/>
+        </p:spPr>
+        <p:txBody>
+          <a:bodyPr wrap="square" lIns="45720" rIns="45720" tIns="27432" bIns="27432" anchor="t">
+            <a:spAutoFit/>
+          </a:bodyPr>
+          <a:lstStyle/>
+          <a:p>
+            <a:pPr algn="l">
+              <a:defRPr sz="1800" b="1">
+                <a:solidFill>
+                  <a:srgbClr val="305D9C"/>
+                </a:solidFill>
+                <a:latin typeface="Aptos"/>
+              </a:defRPr>
             </a:pPr>
             <a:r>
+              <a:t>FSD2 LAB • EXPERIMENT 01</a:t>
+            </a:r>
+          </a:p>
+        </p:txBody>
+      </p:sp>
+      <p:sp>
+        <p:nvSpPr>
+          <p:cNvPr id="4" name="TextBox 3"/>
+          <p:cNvSpPr txBox="1"/>
+          <p:nvPr/>
+        </p:nvSpPr>
+        <p:spPr>
+          <a:xfrm>
+            <a:off x="731520" y="1627632"/>
+            <a:ext cx="10698480" cy="1600200"/>
+          </a:xfrm>
+          <a:prstGeom prst="rect">
+            <a:avLst/>
+          </a:prstGeom>
+          <a:noFill/>
+        </p:spPr>
+        <p:txBody>
+          <a:bodyPr wrap="square" lIns="45720" rIns="45720" tIns="27432" bIns="27432" anchor="ctr">
+            <a:spAutoFit/>
+          </a:bodyPr>
+          <a:lstStyle/>
+          <a:p>
+            <a:pPr algn="l">
+              <a:defRPr sz="3800" b="1">
+                <a:solidFill>
+                  <a:srgbClr val="1B2B4B"/>
+                </a:solidFill>
+                <a:latin typeface="Aptos"/>
+              </a:defRPr>
+            </a:pPr>
+            <a:r>
               <a:t>ExpressJS Routing, HTTP Methods, Middleware</a:t>
             </a:r>
           </a:p>
@@ -3120,24 +3212,72 @@
       </p:sp>
       <p:sp>
         <p:nvSpPr>
-          <p:cNvPr id="3" name="Subtitle 2"/>
-          <p:cNvSpPr>
-            <a:spLocks noGrp="1"/>
-          </p:cNvSpPr>
-          <p:nvPr>
-            <p:ph type="subTitle" idx="1"/>
-          </p:nvPr>
-        </p:nvSpPr>
-        <p:spPr/>
-        <p:txBody>
-          <a:bodyPr/>
-          <a:lstStyle/>
-          <a:p>
-            <a:pPr>
-              <a:defRPr sz="1800"/>
+          <p:cNvPr id="5" name="TextBox 4"/>
+          <p:cNvSpPr txBox="1"/>
+          <p:nvPr/>
+        </p:nvSpPr>
+        <p:spPr>
+          <a:xfrm>
+            <a:off x="731520" y="3493008"/>
+            <a:ext cx="10424160" cy="502920"/>
+          </a:xfrm>
+          <a:prstGeom prst="rect">
+            <a:avLst/>
+          </a:prstGeom>
+          <a:noFill/>
+        </p:spPr>
+        <p:txBody>
+          <a:bodyPr wrap="square" lIns="45720" rIns="45720" tIns="27432" bIns="27432" anchor="t">
+            <a:spAutoFit/>
+          </a:bodyPr>
+          <a:lstStyle/>
+          <a:p>
+            <a:pPr algn="l">
+              <a:defRPr sz="1900" b="0">
+                <a:solidFill>
+                  <a:srgbClr val="666E7A"/>
+                </a:solidFill>
+                <a:latin typeface="Aptos"/>
+              </a:defRPr>
             </a:pPr>
             <a:r>
-              <a:t>FSD2 Lab • Experiment 01</a:t>
+              <a:t>Simple explanation • Clean code • Runtime pathway • Viva preparation</a:t>
+            </a:r>
+          </a:p>
+        </p:txBody>
+      </p:sp>
+      <p:sp>
+        <p:nvSpPr>
+          <p:cNvPr id="6" name="TextBox 5"/>
+          <p:cNvSpPr txBox="1"/>
+          <p:nvPr/>
+        </p:nvSpPr>
+        <p:spPr>
+          <a:xfrm>
+            <a:off x="731520" y="5806440"/>
+            <a:ext cx="3657600" cy="365760"/>
+          </a:xfrm>
+          <a:prstGeom prst="rect">
+            <a:avLst/>
+          </a:prstGeom>
+          <a:noFill/>
+        </p:spPr>
+        <p:txBody>
+          <a:bodyPr wrap="square" lIns="45720" rIns="45720" tIns="27432" bIns="27432" anchor="t">
+            <a:spAutoFit/>
+          </a:bodyPr>
+          <a:lstStyle/>
+          <a:p>
+            <a:pPr algn="l">
+              <a:defRPr sz="1600" b="1">
+                <a:solidFill>
+                  <a:srgbClr val="305D9C"/>
+                </a:solidFill>
+                <a:latin typeface="Aptos"/>
+              </a:defRPr>
+            </a:pPr>
+            <a:r>
+              <a:t>FSD2 Lab Materials</a:t>
             </a:r>
           </a:p>
         </p:txBody>
@@ -3162,62 +3302,57 @@
       <p:grpSpPr/>
       <p:sp>
         <p:nvSpPr>
-          <p:cNvPr id="2" name="Title 1"/>
-          <p:cNvSpPr>
-            <a:spLocks noGrp="1"/>
-          </p:cNvSpPr>
-          <p:nvPr>
-            <p:ph type="title"/>
-          </p:nvPr>
-        </p:nvSpPr>
-        <p:spPr/>
-        <p:txBody>
-          <a:bodyPr/>
-          <a:lstStyle/>
-          <a:p>
-            <a:pPr>
-              <a:defRPr sz="2800"/>
-            </a:pPr>
-            <a:r>
-              <a:t>Syllabus tasks</a:t>
-            </a:r>
-          </a:p>
-        </p:txBody>
-      </p:sp>
-      <p:pic>
-        <p:nvPicPr>
-          <p:cNvPr id="3" name="Picture 2" descr="01_workflow.png"/>
-          <p:cNvPicPr>
-            <a:picLocks noChangeAspect="1"/>
-          </p:cNvPicPr>
-          <p:nvPr/>
-        </p:nvPicPr>
-        <p:blipFill>
-          <a:blip r:embed="rId2"/>
-          <a:stretch>
-            <a:fillRect/>
-          </a:stretch>
-        </p:blipFill>
-        <p:spPr>
-          <a:xfrm>
-            <a:off x="4663440" y="1280160"/>
-            <a:ext cx="6949440" cy="3909060"/>
-          </a:xfrm>
-          <a:prstGeom prst="rect">
-            <a:avLst/>
-          </a:prstGeom>
-        </p:spPr>
-      </p:pic>
-      <p:sp>
-        <p:nvSpPr>
-          <p:cNvPr id="4" name="TextBox 3"/>
+          <p:cNvPr id="2" name="Rectangle 1"/>
+          <p:cNvSpPr/>
+          <p:nvPr/>
+        </p:nvSpPr>
+        <p:spPr>
+          <a:xfrm>
+            <a:off x="0" y="0"/>
+            <a:ext cx="12191695" cy="6858000"/>
+          </a:xfrm>
+          <a:prstGeom prst="rect">
+            <a:avLst/>
+          </a:prstGeom>
+          <a:solidFill>
+            <a:srgbClr val="FFFFFF"/>
+          </a:solidFill>
+          <a:ln>
+            <a:noFill/>
+          </a:ln>
+        </p:spPr>
+        <p:style>
+          <a:lnRef idx="1">
+            <a:schemeClr val="accent1"/>
+          </a:lnRef>
+          <a:fillRef idx="3">
+            <a:schemeClr val="accent1"/>
+          </a:fillRef>
+          <a:effectRef idx="2">
+            <a:schemeClr val="accent1"/>
+          </a:effectRef>
+          <a:fontRef idx="minor">
+            <a:schemeClr val="lt1"/>
+          </a:fontRef>
+        </p:style>
+        <p:txBody>
+          <a:bodyPr rtlCol="0" anchor="ctr"/>
+          <a:lstStyle/>
+          <a:p>
+            <a:pPr algn="ctr"/>
+          </a:p>
+        </p:txBody>
+      </p:sp>
+      <p:sp>
+        <p:nvSpPr>
+          <p:cNvPr id="3" name="TextBox 2"/>
           <p:cNvSpPr txBox="1"/>
           <p:nvPr/>
         </p:nvSpPr>
         <p:spPr>
           <a:xfrm>
-            <a:off x="548640" y="1371600"/>
-            <a:ext cx="3840480" cy="4663440"/>
+            <a:off x="594360" y="274320"/>
+            <a:ext cx="10927080" cy="621792"/>
           </a:xfrm>
           <a:prstGeom prst="rect">
             <a:avLst/>
@@ -3225,38 +3360,285 @@
           <a:noFill/>
         </p:spPr>
         <p:txBody>
-          <a:bodyPr wrap="none">
+          <a:bodyPr wrap="square" lIns="45720" rIns="45720" tIns="27432" bIns="27432" anchor="ctr">
             <a:spAutoFit/>
           </a:bodyPr>
           <a:lstStyle/>
           <a:p>
-            <a:pPr>
-              <a:spcAft>
-                <a:spcPts val="1000"/>
-              </a:spcAft>
-              <a:defRPr sz="1800"/>
+            <a:pPr algn="l">
+              <a:defRPr sz="2700" b="1">
+                <a:solidFill>
+                  <a:srgbClr val="1B2B4B"/>
+                </a:solidFill>
+                <a:latin typeface="Aptos"/>
+              </a:defRPr>
             </a:pPr>
             <a:r>
-              <a:t>Define a route, handle routes, route parameters, query parameters and URL building.</a:t>
-            </a:r>
-          </a:p>
-          <a:p>
-            <a:pPr>
-              <a:spcAft>
-                <a:spcPts val="1000"/>
-              </a:spcAft>
-              <a:defRPr sz="1800"/>
+              <a:t>Syllabus tasks</a:t>
+            </a:r>
+          </a:p>
+        </p:txBody>
+      </p:sp>
+      <p:sp>
+        <p:nvSpPr>
+          <p:cNvPr id="4" name="Rectangle 3"/>
+          <p:cNvSpPr/>
+          <p:nvPr/>
+        </p:nvSpPr>
+        <p:spPr>
+          <a:xfrm>
+            <a:off x="594360" y="950976"/>
+            <a:ext cx="1143000" cy="54864"/>
+          </a:xfrm>
+          <a:prstGeom prst="rect">
+            <a:avLst/>
+          </a:prstGeom>
+          <a:solidFill>
+            <a:srgbClr val="305D9C"/>
+          </a:solidFill>
+          <a:ln>
+            <a:noFill/>
+          </a:ln>
+        </p:spPr>
+        <p:style>
+          <a:lnRef idx="1">
+            <a:schemeClr val="accent1"/>
+          </a:lnRef>
+          <a:fillRef idx="3">
+            <a:schemeClr val="accent1"/>
+          </a:fillRef>
+          <a:effectRef idx="2">
+            <a:schemeClr val="accent1"/>
+          </a:effectRef>
+          <a:fontRef idx="minor">
+            <a:schemeClr val="lt1"/>
+          </a:fontRef>
+        </p:style>
+        <p:txBody>
+          <a:bodyPr rtlCol="0" anchor="ctr"/>
+          <a:lstStyle/>
+          <a:p>
+            <a:pPr algn="ctr"/>
+          </a:p>
+        </p:txBody>
+      </p:sp>
+      <p:sp>
+        <p:nvSpPr>
+          <p:cNvPr id="5" name="TextBox 4"/>
+          <p:cNvSpPr txBox="1"/>
+          <p:nvPr/>
+        </p:nvSpPr>
+        <p:spPr>
+          <a:xfrm>
+            <a:off x="777240" y="1417320"/>
+            <a:ext cx="292608" cy="365760"/>
+          </a:xfrm>
+          <a:prstGeom prst="rect">
+            <a:avLst/>
+          </a:prstGeom>
+          <a:noFill/>
+        </p:spPr>
+        <p:txBody>
+          <a:bodyPr wrap="square" lIns="45720" rIns="45720" tIns="27432" bIns="27432" anchor="t">
+            <a:spAutoFit/>
+          </a:bodyPr>
+          <a:lstStyle/>
+          <a:p>
+            <a:pPr algn="l">
+              <a:defRPr sz="2200" b="1">
+                <a:solidFill>
+                  <a:srgbClr val="305D9C"/>
+                </a:solidFill>
+                <a:latin typeface="Aptos"/>
+              </a:defRPr>
             </a:pPr>
             <a:r>
-              <a:t>Accept data, retrieve data and delete a specified resource using HTTP methods.</a:t>
-            </a:r>
-          </a:p>
-          <a:p>
-            <a:pPr>
-              <a:spcAft>
-                <a:spcPts val="1000"/>
-              </a:spcAft>
-              <a:defRPr sz="1800"/>
+              <a:t>•</a:t>
+            </a:r>
+          </a:p>
+        </p:txBody>
+      </p:sp>
+      <p:sp>
+        <p:nvSpPr>
+          <p:cNvPr id="6" name="TextBox 5"/>
+          <p:cNvSpPr txBox="1"/>
+          <p:nvPr/>
+        </p:nvSpPr>
+        <p:spPr>
+          <a:xfrm>
+            <a:off x="1115568" y="1408176"/>
+            <a:ext cx="10241280" cy="640080"/>
+          </a:xfrm>
+          <a:prstGeom prst="rect">
+            <a:avLst/>
+          </a:prstGeom>
+          <a:noFill/>
+        </p:spPr>
+        <p:txBody>
+          <a:bodyPr wrap="square" lIns="45720" rIns="45720" tIns="27432" bIns="27432" anchor="t">
+            <a:spAutoFit/>
+          </a:bodyPr>
+          <a:lstStyle/>
+          <a:p>
+            <a:pPr algn="l">
+              <a:defRPr sz="1800" b="0">
+                <a:solidFill>
+                  <a:srgbClr val="23272F"/>
+                </a:solidFill>
+                <a:latin typeface="Aptos"/>
+              </a:defRPr>
+            </a:pPr>
+            <a:r>
+              <a:t>Define a route, handle routes, route parameters, query parameters and</a:t>
+            </a:r>
+            <a:br/>
+            <a:r>
+              <a:t>URL building.</a:t>
+            </a:r>
+          </a:p>
+        </p:txBody>
+      </p:sp>
+      <p:sp>
+        <p:nvSpPr>
+          <p:cNvPr id="7" name="TextBox 6"/>
+          <p:cNvSpPr txBox="1"/>
+          <p:nvPr/>
+        </p:nvSpPr>
+        <p:spPr>
+          <a:xfrm>
+            <a:off x="777240" y="2221991"/>
+            <a:ext cx="292608" cy="365760"/>
+          </a:xfrm>
+          <a:prstGeom prst="rect">
+            <a:avLst/>
+          </a:prstGeom>
+          <a:noFill/>
+        </p:spPr>
+        <p:txBody>
+          <a:bodyPr wrap="square" lIns="45720" rIns="45720" tIns="27432" bIns="27432" anchor="t">
+            <a:spAutoFit/>
+          </a:bodyPr>
+          <a:lstStyle/>
+          <a:p>
+            <a:pPr algn="l">
+              <a:defRPr sz="2200" b="1">
+                <a:solidFill>
+                  <a:srgbClr val="305D9C"/>
+                </a:solidFill>
+                <a:latin typeface="Aptos"/>
+              </a:defRPr>
+            </a:pPr>
+            <a:r>
+              <a:t>•</a:t>
+            </a:r>
+          </a:p>
+        </p:txBody>
+      </p:sp>
+      <p:sp>
+        <p:nvSpPr>
+          <p:cNvPr id="8" name="TextBox 7"/>
+          <p:cNvSpPr txBox="1"/>
+          <p:nvPr/>
+        </p:nvSpPr>
+        <p:spPr>
+          <a:xfrm>
+            <a:off x="1115568" y="2212848"/>
+            <a:ext cx="10241280" cy="640080"/>
+          </a:xfrm>
+          <a:prstGeom prst="rect">
+            <a:avLst/>
+          </a:prstGeom>
+          <a:noFill/>
+        </p:spPr>
+        <p:txBody>
+          <a:bodyPr wrap="square" lIns="45720" rIns="45720" tIns="27432" bIns="27432" anchor="t">
+            <a:spAutoFit/>
+          </a:bodyPr>
+          <a:lstStyle/>
+          <a:p>
+            <a:pPr algn="l">
+              <a:defRPr sz="1800" b="0">
+                <a:solidFill>
+                  <a:srgbClr val="23272F"/>
+                </a:solidFill>
+                <a:latin typeface="Aptos"/>
+              </a:defRPr>
+            </a:pPr>
+            <a:r>
+              <a:t>Accept data, retrieve data and delete a specified resource using HTTP</a:t>
+            </a:r>
+            <a:br/>
+            <a:r>
+              <a:t>methods.</a:t>
+            </a:r>
+          </a:p>
+        </p:txBody>
+      </p:sp>
+      <p:sp>
+        <p:nvSpPr>
+          <p:cNvPr id="9" name="TextBox 8"/>
+          <p:cNvSpPr txBox="1"/>
+          <p:nvPr/>
+        </p:nvSpPr>
+        <p:spPr>
+          <a:xfrm>
+            <a:off x="777240" y="3026663"/>
+            <a:ext cx="292608" cy="365760"/>
+          </a:xfrm>
+          <a:prstGeom prst="rect">
+            <a:avLst/>
+          </a:prstGeom>
+          <a:noFill/>
+        </p:spPr>
+        <p:txBody>
+          <a:bodyPr wrap="square" lIns="45720" rIns="45720" tIns="27432" bIns="27432" anchor="t">
+            <a:spAutoFit/>
+          </a:bodyPr>
+          <a:lstStyle/>
+          <a:p>
+            <a:pPr algn="l">
+              <a:defRPr sz="2200" b="1">
+                <a:solidFill>
+                  <a:srgbClr val="305D9C"/>
+                </a:solidFill>
+                <a:latin typeface="Aptos"/>
+              </a:defRPr>
+            </a:pPr>
+            <a:r>
+              <a:t>•</a:t>
+            </a:r>
+          </a:p>
+        </p:txBody>
+      </p:sp>
+      <p:sp>
+        <p:nvSpPr>
+          <p:cNvPr id="10" name="TextBox 9"/>
+          <p:cNvSpPr txBox="1"/>
+          <p:nvPr/>
+        </p:nvSpPr>
+        <p:spPr>
+          <a:xfrm>
+            <a:off x="1115568" y="3017520"/>
+            <a:ext cx="10241280" cy="384048"/>
+          </a:xfrm>
+          <a:prstGeom prst="rect">
+            <a:avLst/>
+          </a:prstGeom>
+          <a:noFill/>
+        </p:spPr>
+        <p:txBody>
+          <a:bodyPr wrap="square" lIns="45720" rIns="45720" tIns="27432" bIns="27432" anchor="t">
+            <a:spAutoFit/>
+          </a:bodyPr>
+          <a:lstStyle/>
+          <a:p>
+            <a:pPr algn="l">
+              <a:defRPr sz="1800" b="0">
+                <a:solidFill>
+                  <a:srgbClr val="23272F"/>
+                </a:solidFill>
+                <a:latin typeface="Aptos"/>
+              </a:defRPr>
             </a:pPr>
             <a:r>
               <a:t>Show the working of middleware.</a:t>
@@ -3284,31 +3666,129 @@
       <p:grpSpPr/>
       <p:sp>
         <p:nvSpPr>
-          <p:cNvPr id="2" name="Title 1"/>
-          <p:cNvSpPr>
-            <a:spLocks noGrp="1"/>
-          </p:cNvSpPr>
-          <p:nvPr>
-            <p:ph type="title"/>
-          </p:nvPr>
-        </p:nvSpPr>
-        <p:spPr/>
-        <p:txBody>
-          <a:bodyPr/>
-          <a:lstStyle/>
-          <a:p>
-            <a:pPr>
-              <a:defRPr sz="2800"/>
+          <p:cNvPr id="2" name="Rectangle 1"/>
+          <p:cNvSpPr/>
+          <p:nvPr/>
+        </p:nvSpPr>
+        <p:spPr>
+          <a:xfrm>
+            <a:off x="0" y="0"/>
+            <a:ext cx="12191695" cy="6858000"/>
+          </a:xfrm>
+          <a:prstGeom prst="rect">
+            <a:avLst/>
+          </a:prstGeom>
+          <a:solidFill>
+            <a:srgbClr val="FFFFFF"/>
+          </a:solidFill>
+          <a:ln>
+            <a:noFill/>
+          </a:ln>
+        </p:spPr>
+        <p:style>
+          <a:lnRef idx="1">
+            <a:schemeClr val="accent1"/>
+          </a:lnRef>
+          <a:fillRef idx="3">
+            <a:schemeClr val="accent1"/>
+          </a:fillRef>
+          <a:effectRef idx="2">
+            <a:schemeClr val="accent1"/>
+          </a:effectRef>
+          <a:fontRef idx="minor">
+            <a:schemeClr val="lt1"/>
+          </a:fontRef>
+        </p:style>
+        <p:txBody>
+          <a:bodyPr rtlCol="0" anchor="ctr"/>
+          <a:lstStyle/>
+          <a:p>
+            <a:pPr algn="ctr"/>
+          </a:p>
+        </p:txBody>
+      </p:sp>
+      <p:sp>
+        <p:nvSpPr>
+          <p:cNvPr id="3" name="TextBox 2"/>
+          <p:cNvSpPr txBox="1"/>
+          <p:nvPr/>
+        </p:nvSpPr>
+        <p:spPr>
+          <a:xfrm>
+            <a:off x="594360" y="274320"/>
+            <a:ext cx="10927080" cy="621792"/>
+          </a:xfrm>
+          <a:prstGeom prst="rect">
+            <a:avLst/>
+          </a:prstGeom>
+          <a:noFill/>
+        </p:spPr>
+        <p:txBody>
+          <a:bodyPr wrap="square" lIns="45720" rIns="45720" tIns="27432" bIns="27432" anchor="ctr">
+            <a:spAutoFit/>
+          </a:bodyPr>
+          <a:lstStyle/>
+          <a:p>
+            <a:pPr algn="l">
+              <a:defRPr sz="2700" b="1">
+                <a:solidFill>
+                  <a:srgbClr val="1B2B4B"/>
+                </a:solidFill>
+                <a:latin typeface="Aptos"/>
+              </a:defRPr>
             </a:pPr>
             <a:r>
               <a:t>How it works</a:t>
             </a:r>
+          </a:p>
+        </p:txBody>
+      </p:sp>
+      <p:sp>
+        <p:nvSpPr>
+          <p:cNvPr id="4" name="Rectangle 3"/>
+          <p:cNvSpPr/>
+          <p:nvPr/>
+        </p:nvSpPr>
+        <p:spPr>
+          <a:xfrm>
+            <a:off x="594360" y="950976"/>
+            <a:ext cx="1143000" cy="54864"/>
+          </a:xfrm>
+          <a:prstGeom prst="rect">
+            <a:avLst/>
+          </a:prstGeom>
+          <a:solidFill>
+            <a:srgbClr val="305D9C"/>
+          </a:solidFill>
+          <a:ln>
+            <a:noFill/>
+          </a:ln>
+        </p:spPr>
+        <p:style>
+          <a:lnRef idx="1">
+            <a:schemeClr val="accent1"/>
+          </a:lnRef>
+          <a:fillRef idx="3">
+            <a:schemeClr val="accent1"/>
+          </a:fillRef>
+          <a:effectRef idx="2">
+            <a:schemeClr val="accent1"/>
+          </a:effectRef>
+          <a:fontRef idx="minor">
+            <a:schemeClr val="lt1"/>
+          </a:fontRef>
+        </p:style>
+        <p:txBody>
+          <a:bodyPr rtlCol="0" anchor="ctr"/>
+          <a:lstStyle/>
+          <a:p>
+            <a:pPr algn="ctr"/>
           </a:p>
         </p:txBody>
       </p:sp>
       <p:pic>
         <p:nvPicPr>
-          <p:cNvPr id="3" name="Picture 2" descr="01_workflow.png"/>
+          <p:cNvPr id="5" name="Picture 4" descr="01_workflow.png"/>
           <p:cNvPicPr>
             <a:picLocks noChangeAspect="1"/>
           </p:cNvPicPr>
@@ -3322,14 +3802,50 @@
         </p:blipFill>
         <p:spPr>
           <a:xfrm>
-            <a:off x="457200" y="1097280"/>
-            <a:ext cx="11155680" cy="6275070"/>
+            <a:off x="594360" y="1280160"/>
+            <a:ext cx="10972800" cy="5074920"/>
           </a:xfrm>
           <a:prstGeom prst="rect">
             <a:avLst/>
           </a:prstGeom>
         </p:spPr>
       </p:pic>
+      <p:sp>
+        <p:nvSpPr>
+          <p:cNvPr id="6" name="TextBox 5"/>
+          <p:cNvSpPr txBox="1"/>
+          <p:nvPr/>
+        </p:nvSpPr>
+        <p:spPr>
+          <a:xfrm>
+            <a:off x="777240" y="6437376"/>
+            <a:ext cx="10607040" cy="228600"/>
+          </a:xfrm>
+          <a:prstGeom prst="rect">
+            <a:avLst/>
+          </a:prstGeom>
+          <a:noFill/>
+        </p:spPr>
+        <p:txBody>
+          <a:bodyPr wrap="square" lIns="45720" rIns="45720" tIns="27432" bIns="27432" anchor="t">
+            <a:spAutoFit/>
+          </a:bodyPr>
+          <a:lstStyle/>
+          <a:p>
+            <a:pPr algn="ctr">
+              <a:defRPr sz="1200" b="0">
+                <a:solidFill>
+                  <a:srgbClr val="666E7A"/>
+                </a:solidFill>
+                <a:latin typeface="Aptos"/>
+              </a:defRPr>
+            </a:pPr>
+            <a:r>
+              <a:t>Input → processing → data/state → output</a:t>
+            </a:r>
+          </a:p>
+        </p:txBody>
+      </p:sp>
     </p:spTree>
   </p:cSld>
   <p:clrMapOvr>
@@ -3350,282 +3866,275 @@
       <p:grpSpPr/>
       <p:sp>
         <p:nvSpPr>
-          <p:cNvPr id="2" name="Title 1"/>
-          <p:cNvSpPr>
-            <a:spLocks noGrp="1"/>
-          </p:cNvSpPr>
-          <p:nvPr>
-            <p:ph type="title"/>
-          </p:nvPr>
-        </p:nvSpPr>
-        <p:spPr/>
-        <p:txBody>
-          <a:bodyPr/>
-          <a:lstStyle/>
-          <a:p>
-            <a:pPr>
-              <a:defRPr sz="2800"/>
+          <p:cNvPr id="2" name="Rectangle 1"/>
+          <p:cNvSpPr/>
+          <p:nvPr/>
+        </p:nvSpPr>
+        <p:spPr>
+          <a:xfrm>
+            <a:off x="0" y="0"/>
+            <a:ext cx="12191695" cy="6858000"/>
+          </a:xfrm>
+          <a:prstGeom prst="rect">
+            <a:avLst/>
+          </a:prstGeom>
+          <a:solidFill>
+            <a:srgbClr val="FFFFFF"/>
+          </a:solidFill>
+          <a:ln>
+            <a:noFill/>
+          </a:ln>
+        </p:spPr>
+        <p:style>
+          <a:lnRef idx="1">
+            <a:schemeClr val="accent1"/>
+          </a:lnRef>
+          <a:fillRef idx="3">
+            <a:schemeClr val="accent1"/>
+          </a:fillRef>
+          <a:effectRef idx="2">
+            <a:schemeClr val="accent1"/>
+          </a:effectRef>
+          <a:fontRef idx="minor">
+            <a:schemeClr val="lt1"/>
+          </a:fontRef>
+        </p:style>
+        <p:txBody>
+          <a:bodyPr rtlCol="0" anchor="ctr"/>
+          <a:lstStyle/>
+          <a:p>
+            <a:pPr algn="ctr"/>
+          </a:p>
+        </p:txBody>
+      </p:sp>
+      <p:sp>
+        <p:nvSpPr>
+          <p:cNvPr id="3" name="TextBox 2"/>
+          <p:cNvSpPr txBox="1"/>
+          <p:nvPr/>
+        </p:nvSpPr>
+        <p:spPr>
+          <a:xfrm>
+            <a:off x="594360" y="274320"/>
+            <a:ext cx="10927080" cy="621792"/>
+          </a:xfrm>
+          <a:prstGeom prst="rect">
+            <a:avLst/>
+          </a:prstGeom>
+          <a:noFill/>
+        </p:spPr>
+        <p:txBody>
+          <a:bodyPr wrap="square" lIns="45720" rIns="45720" tIns="27432" bIns="27432" anchor="ctr">
+            <a:spAutoFit/>
+          </a:bodyPr>
+          <a:lstStyle/>
+          <a:p>
+            <a:pPr algn="l">
+              <a:defRPr sz="2700" b="1">
+                <a:solidFill>
+                  <a:srgbClr val="1B2B4B"/>
+                </a:solidFill>
+                <a:latin typeface="Aptos"/>
+              </a:defRPr>
             </a:pPr>
             <a:r>
-              <a:t>Code pathway</a:t>
-            </a:r>
-          </a:p>
-        </p:txBody>
-      </p:sp>
-      <p:sp>
-        <p:nvSpPr>
-          <p:cNvPr id="3" name="Content Placeholder 2"/>
-          <p:cNvSpPr>
-            <a:spLocks noGrp="1"/>
-          </p:cNvSpPr>
-          <p:nvPr>
-            <p:ph idx="1"/>
-          </p:nvPr>
-        </p:nvSpPr>
-        <p:spPr/>
-        <p:txBody>
-          <a:bodyPr/>
-          <a:lstStyle/>
-          <a:p>
-            <a:pPr>
-              <a:spcAft>
-                <a:spcPts val="800"/>
-              </a:spcAft>
-              <a:defRPr sz="1800"/>
+              <a:t>Code pathway 1</a:t>
+            </a:r>
+          </a:p>
+        </p:txBody>
+      </p:sp>
+      <p:sp>
+        <p:nvSpPr>
+          <p:cNvPr id="4" name="Rectangle 3"/>
+          <p:cNvSpPr/>
+          <p:nvPr/>
+        </p:nvSpPr>
+        <p:spPr>
+          <a:xfrm>
+            <a:off x="594360" y="950976"/>
+            <a:ext cx="1143000" cy="54864"/>
+          </a:xfrm>
+          <a:prstGeom prst="rect">
+            <a:avLst/>
+          </a:prstGeom>
+          <a:solidFill>
+            <a:srgbClr val="305D9C"/>
+          </a:solidFill>
+          <a:ln>
+            <a:noFill/>
+          </a:ln>
+        </p:spPr>
+        <p:style>
+          <a:lnRef idx="1">
+            <a:schemeClr val="accent1"/>
+          </a:lnRef>
+          <a:fillRef idx="3">
+            <a:schemeClr val="accent1"/>
+          </a:fillRef>
+          <a:effectRef idx="2">
+            <a:schemeClr val="accent1"/>
+          </a:effectRef>
+          <a:fontRef idx="minor">
+            <a:schemeClr val="lt1"/>
+          </a:fontRef>
+        </p:style>
+        <p:txBody>
+          <a:bodyPr rtlCol="0" anchor="ctr"/>
+          <a:lstStyle/>
+          <a:p>
+            <a:pPr algn="ctr"/>
+          </a:p>
+        </p:txBody>
+      </p:sp>
+      <p:sp>
+        <p:nvSpPr>
+          <p:cNvPr id="5" name="TextBox 4"/>
+          <p:cNvSpPr txBox="1"/>
+          <p:nvPr/>
+        </p:nvSpPr>
+        <p:spPr>
+          <a:xfrm>
+            <a:off x="1874519" y="356616"/>
+            <a:ext cx="9326880" cy="365760"/>
+          </a:xfrm>
+          <a:prstGeom prst="rect">
+            <a:avLst/>
+          </a:prstGeom>
+          <a:noFill/>
+        </p:spPr>
+        <p:txBody>
+          <a:bodyPr wrap="square" lIns="45720" rIns="45720" tIns="27432" bIns="27432" anchor="t">
+            <a:spAutoFit/>
+          </a:bodyPr>
+          <a:lstStyle/>
+          <a:p>
+            <a:pPr algn="l">
+              <a:defRPr sz="1300" b="0">
+                <a:solidFill>
+                  <a:srgbClr val="666E7A"/>
+                </a:solidFill>
+                <a:latin typeface="Aptos"/>
+              </a:defRPr>
             </a:pPr>
             <a:r>
-              <a:t>app.js:1 const express = require('express');</a:t>
-            </a:r>
-          </a:p>
-          <a:p>
-            <a:pPr>
-              <a:spcAft>
-                <a:spcPts val="800"/>
-              </a:spcAft>
-              <a:defRPr sz="1800"/>
+              <a:t>app.js • lines 1–10</a:t>
+            </a:r>
+          </a:p>
+        </p:txBody>
+      </p:sp>
+      <p:sp>
+        <p:nvSpPr>
+          <p:cNvPr id="6" name="Rounded Rectangle 5"/>
+          <p:cNvSpPr/>
+          <p:nvPr/>
+        </p:nvSpPr>
+        <p:spPr>
+          <a:xfrm>
+            <a:off x="594360" y="1298448"/>
+            <a:ext cx="10972800" cy="5074920"/>
+          </a:xfrm>
+          <a:prstGeom prst="roundRect">
+            <a:avLst/>
+          </a:prstGeom>
+          <a:solidFill>
+            <a:srgbClr val="F8FAFC"/>
+          </a:solidFill>
+          <a:ln>
+            <a:solidFill>
+              <a:srgbClr val="DCE1E8"/>
+            </a:solidFill>
+          </a:ln>
+        </p:spPr>
+        <p:style>
+          <a:lnRef idx="1">
+            <a:schemeClr val="accent1"/>
+          </a:lnRef>
+          <a:fillRef idx="3">
+            <a:schemeClr val="accent1"/>
+          </a:fillRef>
+          <a:effectRef idx="2">
+            <a:schemeClr val="accent1"/>
+          </a:effectRef>
+          <a:fontRef idx="minor">
+            <a:schemeClr val="lt1"/>
+          </a:fontRef>
+        </p:style>
+        <p:txBody>
+          <a:bodyPr rtlCol="0" anchor="ctr"/>
+          <a:lstStyle/>
+          <a:p>
+            <a:pPr algn="ctr"/>
+          </a:p>
+        </p:txBody>
+      </p:sp>
+      <p:sp>
+        <p:nvSpPr>
+          <p:cNvPr id="7" name="TextBox 6"/>
+          <p:cNvSpPr txBox="1"/>
+          <p:nvPr/>
+        </p:nvSpPr>
+        <p:spPr>
+          <a:xfrm>
+            <a:off x="822960" y="1536192"/>
+            <a:ext cx="10515600" cy="4617720"/>
+          </a:xfrm>
+          <a:prstGeom prst="rect">
+            <a:avLst/>
+          </a:prstGeom>
+          <a:noFill/>
+        </p:spPr>
+        <p:txBody>
+          <a:bodyPr wrap="square" lIns="45720" rIns="45720" tIns="27432" bIns="27432" anchor="t">
+            <a:spAutoFit/>
+          </a:bodyPr>
+          <a:lstStyle/>
+          <a:p>
+            <a:pPr algn="l">
+              <a:defRPr sz="1250" b="0">
+                <a:solidFill>
+                  <a:srgbClr val="23272F"/>
+                </a:solidFill>
+                <a:latin typeface="DejaVu Sans Mono"/>
+              </a:defRPr>
             </a:pPr>
             <a:r>
-              <a:t>app.js:2 const app = express();</a:t>
-            </a:r>
-          </a:p>
-          <a:p>
-            <a:pPr>
-              <a:spcAft>
-                <a:spcPts val="800"/>
-              </a:spcAft>
-              <a:defRPr sz="1800"/>
-            </a:pPr>
-            <a:r>
-              <a:t>app.js:3 const PORT = 3001;</a:t>
-            </a:r>
-          </a:p>
-          <a:p>
-            <a:pPr>
-              <a:spcAft>
-                <a:spcPts val="800"/>
-              </a:spcAft>
-              <a:defRPr sz="1800"/>
-            </a:pPr>
-            <a:r>
-              <a:t>app.js:4 </a:t>
-            </a:r>
-          </a:p>
-          <a:p>
-            <a:pPr>
-              <a:spcAft>
-                <a:spcPts val="800"/>
-              </a:spcAft>
-              <a:defRPr sz="1800"/>
-            </a:pPr>
-            <a:r>
-              <a:t>app.js:5 app.use(express.json()); // Read JSON request bodies.</a:t>
-            </a:r>
-          </a:p>
-          <a:p>
-            <a:pPr>
-              <a:spcAft>
-                <a:spcPts val="800"/>
-              </a:spcAft>
-              <a:defRPr sz="1800"/>
-            </a:pPr>
-            <a:r>
-              <a:t>app.js:6 </a:t>
-            </a:r>
-          </a:p>
-          <a:p>
-            <a:pPr>
-              <a:spcAft>
-                <a:spcPts val="800"/>
-              </a:spcAft>
-              <a:defRPr sz="1800"/>
-            </a:pPr>
-            <a:r>
-              <a:t>app.js:7 // Simple custom middleware: runs before the route handler.</a:t>
-            </a:r>
-          </a:p>
-          <a:p>
-            <a:pPr>
-              <a:spcAft>
-                <a:spcPts val="800"/>
-              </a:spcAft>
-              <a:defRPr sz="1800"/>
-            </a:pPr>
-            <a:r>
-              <a:t>app.js:8 app.use((req, res, next) =&gt; {</a:t>
-            </a:r>
-          </a:p>
-          <a:p>
-            <a:pPr>
-              <a:spcAft>
-                <a:spcPts val="800"/>
-              </a:spcAft>
-              <a:defRPr sz="1800"/>
-            </a:pPr>
-            <a:r>
-              <a:t>app.js:9   console.log(req.method, req.url); // Show method and URL in terminal.</a:t>
-            </a:r>
-          </a:p>
-          <a:p>
-            <a:pPr>
-              <a:spcAft>
-                <a:spcPts val="800"/>
-              </a:spcAft>
-              <a:defRPr sz="1800"/>
-            </a:pPr>
-            <a:r>
-              <a:t>app.js:10   next(); // Continue to the next middleware/route.</a:t>
-            </a:r>
-          </a:p>
-          <a:p>
-            <a:pPr>
-              <a:spcAft>
-                <a:spcPts val="800"/>
-              </a:spcAft>
-              <a:defRPr sz="1800"/>
-            </a:pPr>
-            <a:r>
-              <a:t>app.js:11 });</a:t>
-            </a:r>
-          </a:p>
-          <a:p>
-            <a:pPr>
-              <a:spcAft>
-                <a:spcPts val="800"/>
-              </a:spcAft>
-              <a:defRPr sz="1800"/>
-            </a:pPr>
-            <a:r>
-              <a:t>app.js:12 </a:t>
-            </a:r>
-          </a:p>
-          <a:p>
-            <a:pPr>
-              <a:spcAft>
-                <a:spcPts val="800"/>
-              </a:spcAft>
-              <a:defRPr sz="1800"/>
-            </a:pPr>
-            <a:r>
-              <a:t>app.js:13 let students = [{ id: 1, name: 'Rama' }];</a:t>
-            </a:r>
-          </a:p>
-          <a:p>
-            <a:pPr>
-              <a:spcAft>
-                <a:spcPts val="800"/>
-              </a:spcAft>
-              <a:defRPr sz="1800"/>
-            </a:pPr>
-            <a:r>
-              <a:t>app.js:14 </a:t>
-            </a:r>
-          </a:p>
-          <a:p>
-            <a:pPr>
-              <a:spcAft>
-                <a:spcPts val="800"/>
-              </a:spcAft>
-              <a:defRPr sz="1800"/>
-            </a:pPr>
-            <a:r>
-              <a:t>app.js:15 app.get('/', (req, res) =&gt; {</a:t>
-            </a:r>
-          </a:p>
-          <a:p>
-            <a:pPr>
-              <a:spcAft>
-                <a:spcPts val="800"/>
-              </a:spcAft>
-              <a:defRPr sz="1800"/>
-            </a:pPr>
-            <a:r>
-              <a:t>app.js:16   res.send('FSD2 Express Lab is running');</a:t>
-            </a:r>
-          </a:p>
-          <a:p>
-            <a:pPr>
-              <a:spcAft>
-                <a:spcPts val="800"/>
-              </a:spcAft>
-              <a:defRPr sz="1800"/>
-            </a:pPr>
-            <a:r>
-              <a:t>app.js:17 });</a:t>
-            </a:r>
-          </a:p>
-          <a:p>
-            <a:pPr>
-              <a:spcAft>
-                <a:spcPts val="800"/>
-              </a:spcAft>
-              <a:defRPr sz="1800"/>
-            </a:pPr>
-            <a:r>
-              <a:t>app.js:18 </a:t>
-            </a:r>
-          </a:p>
-          <a:p>
-            <a:pPr>
-              <a:spcAft>
-                <a:spcPts val="800"/>
-              </a:spcAft>
-              <a:defRPr sz="1800"/>
-            </a:pPr>
-            <a:r>
-              <a:t>app.js:19 // Route parameter: /students/1</a:t>
-            </a:r>
-          </a:p>
-          <a:p>
-            <a:pPr>
-              <a:spcAft>
-                <a:spcPts val="800"/>
-              </a:spcAft>
-              <a:defRPr sz="1800"/>
-            </a:pPr>
-            <a:r>
-              <a:t>app.js:20 app.get('/students/:id', (req, res) =&gt; {</a:t>
-            </a:r>
-          </a:p>
-          <a:p>
-            <a:pPr>
-              <a:spcAft>
-                <a:spcPts val="800"/>
-              </a:spcAft>
-              <a:defRPr sz="1800"/>
-            </a:pPr>
-            <a:r>
-              <a:t>app.js:21   const student = students.find(s =&gt; s.id === Number(req.params.id));</a:t>
-            </a:r>
-          </a:p>
-          <a:p>
-            <a:pPr>
-              <a:spcAft>
-                <a:spcPts val="800"/>
-              </a:spcAft>
-              <a:defRPr sz="1800"/>
-            </a:pPr>
-            <a:r>
-              <a:t>app.js:22   res.json(student || { message: 'Student not found' });</a:t>
+              <a:t>  1  const express = require('express');</a:t>
+            </a:r>
+            <a:br/>
+            <a:r>
+              <a:t>  2  const app = express();</a:t>
+            </a:r>
+            <a:br/>
+            <a:r>
+              <a:t>  3  const PORT = 3001;</a:t>
+            </a:r>
+            <a:br/>
+            <a:r>
+              <a:t>  4  </a:t>
+            </a:r>
+            <a:br/>
+            <a:r>
+              <a:t>  5  app.use(express.json()); // Read JSON request bodies.</a:t>
+            </a:r>
+            <a:br/>
+            <a:r>
+              <a:t>  6  </a:t>
+            </a:r>
+            <a:br/>
+            <a:r>
+              <a:t>  7  // Simple custom middleware: runs before the route handler.</a:t>
+            </a:r>
+            <a:br/>
+            <a:r>
+              <a:t>  8  app.use((req, res, next) =&gt; {</a:t>
+            </a:r>
+            <a:br/>
+            <a:r>
+              <a:t>  9    console.log(req.method, req.url); // Show method and URL in terminal.</a:t>
+            </a:r>
+            <a:br/>
+            <a:r>
+              <a:t> 10    next(); // Continue to the next middleware/route.</a:t>
             </a:r>
           </a:p>
         </p:txBody>
@@ -3650,52 +4159,279 @@
       <p:grpSpPr/>
       <p:sp>
         <p:nvSpPr>
-          <p:cNvPr id="2" name="Title 1"/>
-          <p:cNvSpPr>
-            <a:spLocks noGrp="1"/>
-          </p:cNvSpPr>
-          <p:nvPr>
-            <p:ph type="title"/>
-          </p:nvPr>
-        </p:nvSpPr>
-        <p:spPr/>
-        <p:txBody>
-          <a:bodyPr/>
-          <a:lstStyle/>
-          <a:p>
-            <a:pPr>
-              <a:defRPr sz="2800"/>
+          <p:cNvPr id="2" name="Rectangle 1"/>
+          <p:cNvSpPr/>
+          <p:nvPr/>
+        </p:nvSpPr>
+        <p:spPr>
+          <a:xfrm>
+            <a:off x="0" y="0"/>
+            <a:ext cx="12191695" cy="6858000"/>
+          </a:xfrm>
+          <a:prstGeom prst="rect">
+            <a:avLst/>
+          </a:prstGeom>
+          <a:solidFill>
+            <a:srgbClr val="FFFFFF"/>
+          </a:solidFill>
+          <a:ln>
+            <a:noFill/>
+          </a:ln>
+        </p:spPr>
+        <p:style>
+          <a:lnRef idx="1">
+            <a:schemeClr val="accent1"/>
+          </a:lnRef>
+          <a:fillRef idx="3">
+            <a:schemeClr val="accent1"/>
+          </a:fillRef>
+          <a:effectRef idx="2">
+            <a:schemeClr val="accent1"/>
+          </a:effectRef>
+          <a:fontRef idx="minor">
+            <a:schemeClr val="lt1"/>
+          </a:fontRef>
+        </p:style>
+        <p:txBody>
+          <a:bodyPr rtlCol="0" anchor="ctr"/>
+          <a:lstStyle/>
+          <a:p>
+            <a:pPr algn="ctr"/>
+          </a:p>
+        </p:txBody>
+      </p:sp>
+      <p:sp>
+        <p:nvSpPr>
+          <p:cNvPr id="3" name="TextBox 2"/>
+          <p:cNvSpPr txBox="1"/>
+          <p:nvPr/>
+        </p:nvSpPr>
+        <p:spPr>
+          <a:xfrm>
+            <a:off x="594360" y="274320"/>
+            <a:ext cx="10927080" cy="621792"/>
+          </a:xfrm>
+          <a:prstGeom prst="rect">
+            <a:avLst/>
+          </a:prstGeom>
+          <a:noFill/>
+        </p:spPr>
+        <p:txBody>
+          <a:bodyPr wrap="square" lIns="45720" rIns="45720" tIns="27432" bIns="27432" anchor="ctr">
+            <a:spAutoFit/>
+          </a:bodyPr>
+          <a:lstStyle/>
+          <a:p>
+            <a:pPr algn="l">
+              <a:defRPr sz="2700" b="1">
+                <a:solidFill>
+                  <a:srgbClr val="1B2B4B"/>
+                </a:solidFill>
+                <a:latin typeface="Aptos"/>
+              </a:defRPr>
             </a:pPr>
             <a:r>
-              <a:t>Runtime / expected output</a:t>
-            </a:r>
-          </a:p>
-        </p:txBody>
-      </p:sp>
-      <p:pic>
-        <p:nvPicPr>
-          <p:cNvPr id="3" name="Picture 2" descr="01_runtime.png"/>
-          <p:cNvPicPr>
-            <a:picLocks noChangeAspect="1"/>
-          </p:cNvPicPr>
-          <p:nvPr/>
-        </p:nvPicPr>
-        <p:blipFill>
-          <a:blip r:embed="rId2"/>
-          <a:stretch>
-            <a:fillRect/>
-          </a:stretch>
-        </p:blipFill>
-        <p:spPr>
-          <a:xfrm>
-            <a:off x="457200" y="1188720"/>
-            <a:ext cx="11155680" cy="6275070"/>
-          </a:xfrm>
-          <a:prstGeom prst="rect">
-            <a:avLst/>
-          </a:prstGeom>
-        </p:spPr>
-      </p:pic>
+              <a:t>Code pathway 2</a:t>
+            </a:r>
+          </a:p>
+        </p:txBody>
+      </p:sp>
+      <p:sp>
+        <p:nvSpPr>
+          <p:cNvPr id="4" name="Rectangle 3"/>
+          <p:cNvSpPr/>
+          <p:nvPr/>
+        </p:nvSpPr>
+        <p:spPr>
+          <a:xfrm>
+            <a:off x="594360" y="950976"/>
+            <a:ext cx="1143000" cy="54864"/>
+          </a:xfrm>
+          <a:prstGeom prst="rect">
+            <a:avLst/>
+          </a:prstGeom>
+          <a:solidFill>
+            <a:srgbClr val="305D9C"/>
+          </a:solidFill>
+          <a:ln>
+            <a:noFill/>
+          </a:ln>
+        </p:spPr>
+        <p:style>
+          <a:lnRef idx="1">
+            <a:schemeClr val="accent1"/>
+          </a:lnRef>
+          <a:fillRef idx="3">
+            <a:schemeClr val="accent1"/>
+          </a:fillRef>
+          <a:effectRef idx="2">
+            <a:schemeClr val="accent1"/>
+          </a:effectRef>
+          <a:fontRef idx="minor">
+            <a:schemeClr val="lt1"/>
+          </a:fontRef>
+        </p:style>
+        <p:txBody>
+          <a:bodyPr rtlCol="0" anchor="ctr"/>
+          <a:lstStyle/>
+          <a:p>
+            <a:pPr algn="ctr"/>
+          </a:p>
+        </p:txBody>
+      </p:sp>
+      <p:sp>
+        <p:nvSpPr>
+          <p:cNvPr id="5" name="TextBox 4"/>
+          <p:cNvSpPr txBox="1"/>
+          <p:nvPr/>
+        </p:nvSpPr>
+        <p:spPr>
+          <a:xfrm>
+            <a:off x="1874519" y="356616"/>
+            <a:ext cx="9326880" cy="365760"/>
+          </a:xfrm>
+          <a:prstGeom prst="rect">
+            <a:avLst/>
+          </a:prstGeom>
+          <a:noFill/>
+        </p:spPr>
+        <p:txBody>
+          <a:bodyPr wrap="square" lIns="45720" rIns="45720" tIns="27432" bIns="27432" anchor="t">
+            <a:spAutoFit/>
+          </a:bodyPr>
+          <a:lstStyle/>
+          <a:p>
+            <a:pPr algn="l">
+              <a:defRPr sz="1300" b="0">
+                <a:solidFill>
+                  <a:srgbClr val="666E7A"/>
+                </a:solidFill>
+                <a:latin typeface="Aptos"/>
+              </a:defRPr>
+            </a:pPr>
+            <a:r>
+              <a:t>app.js • lines 11–20</a:t>
+            </a:r>
+          </a:p>
+        </p:txBody>
+      </p:sp>
+      <p:sp>
+        <p:nvSpPr>
+          <p:cNvPr id="6" name="Rounded Rectangle 5"/>
+          <p:cNvSpPr/>
+          <p:nvPr/>
+        </p:nvSpPr>
+        <p:spPr>
+          <a:xfrm>
+            <a:off x="594360" y="1298448"/>
+            <a:ext cx="10972800" cy="5074920"/>
+          </a:xfrm>
+          <a:prstGeom prst="roundRect">
+            <a:avLst/>
+          </a:prstGeom>
+          <a:solidFill>
+            <a:srgbClr val="F8FAFC"/>
+          </a:solidFill>
+          <a:ln>
+            <a:solidFill>
+              <a:srgbClr val="DCE1E8"/>
+            </a:solidFill>
+          </a:ln>
+        </p:spPr>
+        <p:style>
+          <a:lnRef idx="1">
+            <a:schemeClr val="accent1"/>
+          </a:lnRef>
+          <a:fillRef idx="3">
+            <a:schemeClr val="accent1"/>
+          </a:fillRef>
+          <a:effectRef idx="2">
+            <a:schemeClr val="accent1"/>
+          </a:effectRef>
+          <a:fontRef idx="minor">
+            <a:schemeClr val="lt1"/>
+          </a:fontRef>
+        </p:style>
+        <p:txBody>
+          <a:bodyPr rtlCol="0" anchor="ctr"/>
+          <a:lstStyle/>
+          <a:p>
+            <a:pPr algn="ctr"/>
+          </a:p>
+        </p:txBody>
+      </p:sp>
+      <p:sp>
+        <p:nvSpPr>
+          <p:cNvPr id="7" name="TextBox 6"/>
+          <p:cNvSpPr txBox="1"/>
+          <p:nvPr/>
+        </p:nvSpPr>
+        <p:spPr>
+          <a:xfrm>
+            <a:off x="822960" y="1536192"/>
+            <a:ext cx="10515600" cy="4617720"/>
+          </a:xfrm>
+          <a:prstGeom prst="rect">
+            <a:avLst/>
+          </a:prstGeom>
+          <a:noFill/>
+        </p:spPr>
+        <p:txBody>
+          <a:bodyPr wrap="square" lIns="45720" rIns="45720" tIns="27432" bIns="27432" anchor="t">
+            <a:spAutoFit/>
+          </a:bodyPr>
+          <a:lstStyle/>
+          <a:p>
+            <a:pPr algn="l">
+              <a:defRPr sz="1250" b="0">
+                <a:solidFill>
+                  <a:srgbClr val="23272F"/>
+                </a:solidFill>
+                <a:latin typeface="DejaVu Sans Mono"/>
+              </a:defRPr>
+            </a:pPr>
+            <a:r>
+              <a:t> 11  });</a:t>
+            </a:r>
+            <a:br/>
+            <a:r>
+              <a:t> 12  </a:t>
+            </a:r>
+            <a:br/>
+            <a:r>
+              <a:t> 13  let students = [{ id: 1, name: 'Rama' }];</a:t>
+            </a:r>
+            <a:br/>
+            <a:r>
+              <a:t> 14  </a:t>
+            </a:r>
+            <a:br/>
+            <a:r>
+              <a:t> 15  app.get('/', (req, res) =&gt; {</a:t>
+            </a:r>
+            <a:br/>
+            <a:r>
+              <a:t> 16    res.send('FSD2 Express Lab is running');</a:t>
+            </a:r>
+            <a:br/>
+            <a:r>
+              <a:t> 17  });</a:t>
+            </a:r>
+            <a:br/>
+            <a:r>
+              <a:t> 18  </a:t>
+            </a:r>
+            <a:br/>
+            <a:r>
+              <a:t> 19  // Route parameter: /students/1</a:t>
+            </a:r>
+            <a:br/>
+            <a:r>
+              <a:t> 20  app.get('/students/:id', (req, res) =&gt; {</a:t>
+            </a:r>
+          </a:p>
+        </p:txBody>
+      </p:sp>
     </p:spTree>
   </p:cSld>
   <p:clrMapOvr>
@@ -3716,73 +4452,182 @@
       <p:grpSpPr/>
       <p:sp>
         <p:nvSpPr>
-          <p:cNvPr id="2" name="Title 1"/>
-          <p:cNvSpPr>
-            <a:spLocks noGrp="1"/>
-          </p:cNvSpPr>
-          <p:nvPr>
-            <p:ph type="title"/>
-          </p:nvPr>
-        </p:nvSpPr>
-        <p:spPr/>
-        <p:txBody>
-          <a:bodyPr/>
-          <a:lstStyle/>
-          <a:p>
-            <a:pPr>
-              <a:defRPr sz="2800"/>
+          <p:cNvPr id="2" name="Rectangle 1"/>
+          <p:cNvSpPr/>
+          <p:nvPr/>
+        </p:nvSpPr>
+        <p:spPr>
+          <a:xfrm>
+            <a:off x="0" y="0"/>
+            <a:ext cx="12191695" cy="6858000"/>
+          </a:xfrm>
+          <a:prstGeom prst="rect">
+            <a:avLst/>
+          </a:prstGeom>
+          <a:solidFill>
+            <a:srgbClr val="FFFFFF"/>
+          </a:solidFill>
+          <a:ln>
+            <a:noFill/>
+          </a:ln>
+        </p:spPr>
+        <p:style>
+          <a:lnRef idx="1">
+            <a:schemeClr val="accent1"/>
+          </a:lnRef>
+          <a:fillRef idx="3">
+            <a:schemeClr val="accent1"/>
+          </a:fillRef>
+          <a:effectRef idx="2">
+            <a:schemeClr val="accent1"/>
+          </a:effectRef>
+          <a:fontRef idx="minor">
+            <a:schemeClr val="lt1"/>
+          </a:fontRef>
+        </p:style>
+        <p:txBody>
+          <a:bodyPr rtlCol="0" anchor="ctr"/>
+          <a:lstStyle/>
+          <a:p>
+            <a:pPr algn="ctr"/>
+          </a:p>
+        </p:txBody>
+      </p:sp>
+      <p:sp>
+        <p:nvSpPr>
+          <p:cNvPr id="3" name="TextBox 2"/>
+          <p:cNvSpPr txBox="1"/>
+          <p:nvPr/>
+        </p:nvSpPr>
+        <p:spPr>
+          <a:xfrm>
+            <a:off x="594360" y="274320"/>
+            <a:ext cx="10927080" cy="621792"/>
+          </a:xfrm>
+          <a:prstGeom prst="rect">
+            <a:avLst/>
+          </a:prstGeom>
+          <a:noFill/>
+        </p:spPr>
+        <p:txBody>
+          <a:bodyPr wrap="square" lIns="45720" rIns="45720" tIns="27432" bIns="27432" anchor="ctr">
+            <a:spAutoFit/>
+          </a:bodyPr>
+          <a:lstStyle/>
+          <a:p>
+            <a:pPr algn="l">
+              <a:defRPr sz="2700" b="1">
+                <a:solidFill>
+                  <a:srgbClr val="1B2B4B"/>
+                </a:solidFill>
+                <a:latin typeface="Aptos"/>
+              </a:defRPr>
             </a:pPr>
             <a:r>
-              <a:t>Run it</a:t>
-            </a:r>
-          </a:p>
-        </p:txBody>
-      </p:sp>
-      <p:sp>
-        <p:nvSpPr>
-          <p:cNvPr id="3" name="Content Placeholder 2"/>
-          <p:cNvSpPr>
-            <a:spLocks noGrp="1"/>
-          </p:cNvSpPr>
-          <p:nvPr>
-            <p:ph idx="1"/>
-          </p:nvPr>
-        </p:nvSpPr>
-        <p:spPr/>
-        <p:txBody>
-          <a:bodyPr/>
-          <a:lstStyle/>
-          <a:p>
-            <a:pPr>
-              <a:spcAft>
-                <a:spcPts val="800"/>
-              </a:spcAft>
-              <a:defRPr sz="1800"/>
+              <a:t>Runtime walkthrough</a:t>
+            </a:r>
+          </a:p>
+        </p:txBody>
+      </p:sp>
+      <p:sp>
+        <p:nvSpPr>
+          <p:cNvPr id="4" name="Rectangle 3"/>
+          <p:cNvSpPr/>
+          <p:nvPr/>
+        </p:nvSpPr>
+        <p:spPr>
+          <a:xfrm>
+            <a:off x="594360" y="950976"/>
+            <a:ext cx="1143000" cy="54864"/>
+          </a:xfrm>
+          <a:prstGeom prst="rect">
+            <a:avLst/>
+          </a:prstGeom>
+          <a:solidFill>
+            <a:srgbClr val="305D9C"/>
+          </a:solidFill>
+          <a:ln>
+            <a:noFill/>
+          </a:ln>
+        </p:spPr>
+        <p:style>
+          <a:lnRef idx="1">
+            <a:schemeClr val="accent1"/>
+          </a:lnRef>
+          <a:fillRef idx="3">
+            <a:schemeClr val="accent1"/>
+          </a:fillRef>
+          <a:effectRef idx="2">
+            <a:schemeClr val="accent1"/>
+          </a:effectRef>
+          <a:fontRef idx="minor">
+            <a:schemeClr val="lt1"/>
+          </a:fontRef>
+        </p:style>
+        <p:txBody>
+          <a:bodyPr rtlCol="0" anchor="ctr"/>
+          <a:lstStyle/>
+          <a:p>
+            <a:pPr algn="ctr"/>
+          </a:p>
+        </p:txBody>
+      </p:sp>
+      <p:pic>
+        <p:nvPicPr>
+          <p:cNvPr id="5" name="Picture 4" descr="01_runtime.png"/>
+          <p:cNvPicPr>
+            <a:picLocks noChangeAspect="1"/>
+          </p:cNvPicPr>
+          <p:nvPr/>
+        </p:nvPicPr>
+        <p:blipFill>
+          <a:blip r:embed="rId2"/>
+          <a:stretch>
+            <a:fillRect/>
+          </a:stretch>
+        </p:blipFill>
+        <p:spPr>
+          <a:xfrm>
+            <a:off x="594360" y="1280160"/>
+            <a:ext cx="10972800" cy="5074920"/>
+          </a:xfrm>
+          <a:prstGeom prst="rect">
+            <a:avLst/>
+          </a:prstGeom>
+        </p:spPr>
+      </p:pic>
+      <p:sp>
+        <p:nvSpPr>
+          <p:cNvPr id="6" name="TextBox 5"/>
+          <p:cNvSpPr txBox="1"/>
+          <p:nvPr/>
+        </p:nvSpPr>
+        <p:spPr>
+          <a:xfrm>
+            <a:off x="777240" y="6437376"/>
+            <a:ext cx="10607040" cy="228600"/>
+          </a:xfrm>
+          <a:prstGeom prst="rect">
+            <a:avLst/>
+          </a:prstGeom>
+          <a:noFill/>
+        </p:spPr>
+        <p:txBody>
+          <a:bodyPr wrap="square" lIns="45720" rIns="45720" tIns="27432" bIns="27432" anchor="t">
+            <a:spAutoFit/>
+          </a:bodyPr>
+          <a:lstStyle/>
+          <a:p>
+            <a:pPr algn="ctr">
+              <a:defRPr sz="1200" b="0">
+                <a:solidFill>
+                  <a:srgbClr val="666E7A"/>
+                </a:solidFill>
+                <a:latin typeface="Aptos"/>
+              </a:defRPr>
             </a:pPr>
             <a:r>
-              <a:t>From repository root: see 01-express-routing-http-methods-middleware/README.md</a:t>
-            </a:r>
-          </a:p>
-          <a:p>
-            <a:pPr>
-              <a:spcAft>
-                <a:spcPts val="800"/>
-              </a:spcAft>
-              <a:defRPr sz="1800"/>
-            </a:pPr>
-            <a:r>
-              <a:t>Keep the terminal open while testing the browser or API.</a:t>
-            </a:r>
-          </a:p>
-          <a:p>
-            <a:pPr>
-              <a:spcAft>
-                <a:spcPts val="800"/>
-              </a:spcAft>
-              <a:defRPr sz="1800"/>
-            </a:pPr>
-            <a:r>
-              <a:t>For MongoDB, use mongosh or Atlas as described in the README.</a:t>
+              <a:t>Start → enter input → execute → observe output</a:t>
             </a:r>
           </a:p>
         </p:txBody>
@@ -3807,84 +4652,1261 @@
       <p:grpSpPr/>
       <p:sp>
         <p:nvSpPr>
-          <p:cNvPr id="2" name="Title 1"/>
-          <p:cNvSpPr>
-            <a:spLocks noGrp="1"/>
-          </p:cNvSpPr>
-          <p:nvPr>
-            <p:ph type="title"/>
-          </p:nvPr>
-        </p:nvSpPr>
-        <p:spPr/>
-        <p:txBody>
-          <a:bodyPr/>
-          <a:lstStyle/>
-          <a:p>
-            <a:pPr>
-              <a:defRPr sz="2800"/>
+          <p:cNvPr id="2" name="Rectangle 1"/>
+          <p:cNvSpPr/>
+          <p:nvPr/>
+        </p:nvSpPr>
+        <p:spPr>
+          <a:xfrm>
+            <a:off x="0" y="0"/>
+            <a:ext cx="12191695" cy="6858000"/>
+          </a:xfrm>
+          <a:prstGeom prst="rect">
+            <a:avLst/>
+          </a:prstGeom>
+          <a:solidFill>
+            <a:srgbClr val="FFFFFF"/>
+          </a:solidFill>
+          <a:ln>
+            <a:noFill/>
+          </a:ln>
+        </p:spPr>
+        <p:style>
+          <a:lnRef idx="1">
+            <a:schemeClr val="accent1"/>
+          </a:lnRef>
+          <a:fillRef idx="3">
+            <a:schemeClr val="accent1"/>
+          </a:fillRef>
+          <a:effectRef idx="2">
+            <a:schemeClr val="accent1"/>
+          </a:effectRef>
+          <a:fontRef idx="minor">
+            <a:schemeClr val="lt1"/>
+          </a:fontRef>
+        </p:style>
+        <p:txBody>
+          <a:bodyPr rtlCol="0" anchor="ctr"/>
+          <a:lstStyle/>
+          <a:p>
+            <a:pPr algn="ctr"/>
+          </a:p>
+        </p:txBody>
+      </p:sp>
+      <p:sp>
+        <p:nvSpPr>
+          <p:cNvPr id="3" name="TextBox 2"/>
+          <p:cNvSpPr txBox="1"/>
+          <p:nvPr/>
+        </p:nvSpPr>
+        <p:spPr>
+          <a:xfrm>
+            <a:off x="594360" y="274320"/>
+            <a:ext cx="10927080" cy="621792"/>
+          </a:xfrm>
+          <a:prstGeom prst="rect">
+            <a:avLst/>
+          </a:prstGeom>
+          <a:noFill/>
+        </p:spPr>
+        <p:txBody>
+          <a:bodyPr wrap="square" lIns="45720" rIns="45720" tIns="27432" bIns="27432" anchor="ctr">
+            <a:spAutoFit/>
+          </a:bodyPr>
+          <a:lstStyle/>
+          <a:p>
+            <a:pPr algn="l">
+              <a:defRPr sz="2700" b="1">
+                <a:solidFill>
+                  <a:srgbClr val="1B2B4B"/>
+                </a:solidFill>
+                <a:latin typeface="Aptos"/>
+              </a:defRPr>
             </a:pPr>
             <a:r>
-              <a:t>Viva points</a:t>
-            </a:r>
-          </a:p>
-        </p:txBody>
-      </p:sp>
-      <p:sp>
-        <p:nvSpPr>
-          <p:cNvPr id="3" name="Content Placeholder 2"/>
-          <p:cNvSpPr>
-            <a:spLocks noGrp="1"/>
-          </p:cNvSpPr>
-          <p:nvPr>
-            <p:ph idx="1"/>
-          </p:nvPr>
-        </p:nvSpPr>
-        <p:spPr/>
-        <p:txBody>
-          <a:bodyPr/>
-          <a:lstStyle/>
-          <a:p>
-            <a:pPr>
-              <a:spcAft>
-                <a:spcPts val="800"/>
-              </a:spcAft>
-              <a:defRPr sz="1800"/>
+              <a:t>Expected result</a:t>
+            </a:r>
+          </a:p>
+        </p:txBody>
+      </p:sp>
+      <p:sp>
+        <p:nvSpPr>
+          <p:cNvPr id="4" name="Rectangle 3"/>
+          <p:cNvSpPr/>
+          <p:nvPr/>
+        </p:nvSpPr>
+        <p:spPr>
+          <a:xfrm>
+            <a:off x="594360" y="950976"/>
+            <a:ext cx="1143000" cy="54864"/>
+          </a:xfrm>
+          <a:prstGeom prst="rect">
+            <a:avLst/>
+          </a:prstGeom>
+          <a:solidFill>
+            <a:srgbClr val="305D9C"/>
+          </a:solidFill>
+          <a:ln>
+            <a:noFill/>
+          </a:ln>
+        </p:spPr>
+        <p:style>
+          <a:lnRef idx="1">
+            <a:schemeClr val="accent1"/>
+          </a:lnRef>
+          <a:fillRef idx="3">
+            <a:schemeClr val="accent1"/>
+          </a:fillRef>
+          <a:effectRef idx="2">
+            <a:schemeClr val="accent1"/>
+          </a:effectRef>
+          <a:fontRef idx="minor">
+            <a:schemeClr val="lt1"/>
+          </a:fontRef>
+        </p:style>
+        <p:txBody>
+          <a:bodyPr rtlCol="0" anchor="ctr"/>
+          <a:lstStyle/>
+          <a:p>
+            <a:pPr algn="ctr"/>
+          </a:p>
+        </p:txBody>
+      </p:sp>
+      <p:sp>
+        <p:nvSpPr>
+          <p:cNvPr id="5" name="TextBox 4"/>
+          <p:cNvSpPr txBox="1"/>
+          <p:nvPr/>
+        </p:nvSpPr>
+        <p:spPr>
+          <a:xfrm>
+            <a:off x="1874519" y="356616"/>
+            <a:ext cx="9326880" cy="365760"/>
+          </a:xfrm>
+          <a:prstGeom prst="rect">
+            <a:avLst/>
+          </a:prstGeom>
+          <a:noFill/>
+        </p:spPr>
+        <p:txBody>
+          <a:bodyPr wrap="square" lIns="45720" rIns="45720" tIns="27432" bIns="27432" anchor="t">
+            <a:spAutoFit/>
+          </a:bodyPr>
+          <a:lstStyle/>
+          <a:p>
+            <a:pPr algn="l">
+              <a:defRPr sz="1300" b="0">
+                <a:solidFill>
+                  <a:srgbClr val="666E7A"/>
+                </a:solidFill>
+                <a:latin typeface="Aptos"/>
+              </a:defRPr>
             </a:pPr>
             <a:r>
-              <a:t>What is the input?</a:t>
-            </a:r>
-          </a:p>
-          <a:p>
-            <a:pPr>
-              <a:spcAft>
-                <a:spcPts val="800"/>
-              </a:spcAft>
-              <a:defRPr sz="1800"/>
+              <a:t>ExpressJS Routing, HTTP Methods, Middleware</a:t>
+            </a:r>
+          </a:p>
+        </p:txBody>
+      </p:sp>
+      <p:sp>
+        <p:nvSpPr>
+          <p:cNvPr id="6" name="Rounded Rectangle 5"/>
+          <p:cNvSpPr/>
+          <p:nvPr/>
+        </p:nvSpPr>
+        <p:spPr>
+          <a:xfrm>
+            <a:off x="685800" y="1417320"/>
+            <a:ext cx="3337560" cy="1920240"/>
+          </a:xfrm>
+          <a:prstGeom prst="roundRect">
+            <a:avLst/>
+          </a:prstGeom>
+          <a:solidFill>
+            <a:srgbClr val="F4F6F9"/>
+          </a:solidFill>
+          <a:ln>
+            <a:solidFill>
+              <a:srgbClr val="DCE1E8"/>
+            </a:solidFill>
+          </a:ln>
+        </p:spPr>
+        <p:style>
+          <a:lnRef idx="1">
+            <a:schemeClr val="accent1"/>
+          </a:lnRef>
+          <a:fillRef idx="3">
+            <a:schemeClr val="accent1"/>
+          </a:fillRef>
+          <a:effectRef idx="2">
+            <a:schemeClr val="accent1"/>
+          </a:effectRef>
+          <a:fontRef idx="minor">
+            <a:schemeClr val="lt1"/>
+          </a:fontRef>
+        </p:style>
+        <p:txBody>
+          <a:bodyPr rtlCol="0" anchor="ctr"/>
+          <a:lstStyle/>
+          <a:p>
+            <a:pPr algn="ctr"/>
+          </a:p>
+        </p:txBody>
+      </p:sp>
+      <p:sp>
+        <p:nvSpPr>
+          <p:cNvPr id="7" name="TextBox 6"/>
+          <p:cNvSpPr txBox="1"/>
+          <p:nvPr/>
+        </p:nvSpPr>
+        <p:spPr>
+          <a:xfrm>
+            <a:off x="886968" y="1581912"/>
+            <a:ext cx="2935224" cy="365760"/>
+          </a:xfrm>
+          <a:prstGeom prst="rect">
+            <a:avLst/>
+          </a:prstGeom>
+          <a:noFill/>
+        </p:spPr>
+        <p:txBody>
+          <a:bodyPr wrap="square" lIns="45720" rIns="45720" tIns="27432" bIns="27432" anchor="t">
+            <a:spAutoFit/>
+          </a:bodyPr>
+          <a:lstStyle/>
+          <a:p>
+            <a:pPr algn="l">
+              <a:defRPr sz="1800" b="1">
+                <a:solidFill>
+                  <a:srgbClr val="305D9C"/>
+                </a:solidFill>
+                <a:latin typeface="Aptos"/>
+              </a:defRPr>
             </a:pPr>
             <a:r>
-              <a:t>Which line performs the main operation?</a:t>
-            </a:r>
-          </a:p>
-          <a:p>
-            <a:pPr>
-              <a:spcAft>
-                <a:spcPts val="800"/>
-              </a:spcAft>
-              <a:defRPr sz="1800"/>
+              <a:t>INPUT</a:t>
+            </a:r>
+          </a:p>
+        </p:txBody>
+      </p:sp>
+      <p:sp>
+        <p:nvSpPr>
+          <p:cNvPr id="8" name="TextBox 7"/>
+          <p:cNvSpPr txBox="1"/>
+          <p:nvPr/>
+        </p:nvSpPr>
+        <p:spPr>
+          <a:xfrm>
+            <a:off x="886968" y="2039112"/>
+            <a:ext cx="2935224" cy="1115568"/>
+          </a:xfrm>
+          <a:prstGeom prst="rect">
+            <a:avLst/>
+          </a:prstGeom>
+          <a:noFill/>
+        </p:spPr>
+        <p:txBody>
+          <a:bodyPr wrap="square" lIns="45720" rIns="45720" tIns="27432" bIns="27432" anchor="t">
+            <a:spAutoFit/>
+          </a:bodyPr>
+          <a:lstStyle/>
+          <a:p>
+            <a:pPr algn="l">
+              <a:defRPr sz="1550" b="0">
+                <a:solidFill>
+                  <a:srgbClr val="23272F"/>
+                </a:solidFill>
+                <a:latin typeface="Aptos"/>
+              </a:defRPr>
             </a:pPr>
             <a:r>
-              <a:t>What is the output?</a:t>
-            </a:r>
-          </a:p>
-          <a:p>
-            <a:pPr>
-              <a:spcAft>
-                <a:spcPts val="800"/>
-              </a:spcAft>
-              <a:defRPr sz="1800"/>
+              <a:t>Enter the sample values or open the required page / route.</a:t>
+            </a:r>
+          </a:p>
+        </p:txBody>
+      </p:sp>
+      <p:sp>
+        <p:nvSpPr>
+          <p:cNvPr id="9" name="Rounded Rectangle 8"/>
+          <p:cNvSpPr/>
+          <p:nvPr/>
+        </p:nvSpPr>
+        <p:spPr>
+          <a:xfrm>
+            <a:off x="4434840" y="1417320"/>
+            <a:ext cx="3337560" cy="1920240"/>
+          </a:xfrm>
+          <a:prstGeom prst="roundRect">
+            <a:avLst/>
+          </a:prstGeom>
+          <a:solidFill>
+            <a:srgbClr val="F4F6F9"/>
+          </a:solidFill>
+          <a:ln>
+            <a:solidFill>
+              <a:srgbClr val="DCE1E8"/>
+            </a:solidFill>
+          </a:ln>
+        </p:spPr>
+        <p:style>
+          <a:lnRef idx="1">
+            <a:schemeClr val="accent1"/>
+          </a:lnRef>
+          <a:fillRef idx="3">
+            <a:schemeClr val="accent1"/>
+          </a:fillRef>
+          <a:effectRef idx="2">
+            <a:schemeClr val="accent1"/>
+          </a:effectRef>
+          <a:fontRef idx="minor">
+            <a:schemeClr val="lt1"/>
+          </a:fontRef>
+        </p:style>
+        <p:txBody>
+          <a:bodyPr rtlCol="0" anchor="ctr"/>
+          <a:lstStyle/>
+          <a:p>
+            <a:pPr algn="ctr"/>
+          </a:p>
+        </p:txBody>
+      </p:sp>
+      <p:sp>
+        <p:nvSpPr>
+          <p:cNvPr id="10" name="TextBox 9"/>
+          <p:cNvSpPr txBox="1"/>
+          <p:nvPr/>
+        </p:nvSpPr>
+        <p:spPr>
+          <a:xfrm>
+            <a:off x="4636007" y="1581912"/>
+            <a:ext cx="2935224" cy="365760"/>
+          </a:xfrm>
+          <a:prstGeom prst="rect">
+            <a:avLst/>
+          </a:prstGeom>
+          <a:noFill/>
+        </p:spPr>
+        <p:txBody>
+          <a:bodyPr wrap="square" lIns="45720" rIns="45720" tIns="27432" bIns="27432" anchor="t">
+            <a:spAutoFit/>
+          </a:bodyPr>
+          <a:lstStyle/>
+          <a:p>
+            <a:pPr algn="l">
+              <a:defRPr sz="1800" b="1">
+                <a:solidFill>
+                  <a:srgbClr val="2A7A59"/>
+                </a:solidFill>
+                <a:latin typeface="Aptos"/>
+              </a:defRPr>
             </a:pPr>
             <a:r>
-              <a:t>What changes if the input is changed?</a:t>
+              <a:t>PROCESS</a:t>
+            </a:r>
+          </a:p>
+        </p:txBody>
+      </p:sp>
+      <p:sp>
+        <p:nvSpPr>
+          <p:cNvPr id="11" name="TextBox 10"/>
+          <p:cNvSpPr txBox="1"/>
+          <p:nvPr/>
+        </p:nvSpPr>
+        <p:spPr>
+          <a:xfrm>
+            <a:off x="4636007" y="2039112"/>
+            <a:ext cx="2935224" cy="1115568"/>
+          </a:xfrm>
+          <a:prstGeom prst="rect">
+            <a:avLst/>
+          </a:prstGeom>
+          <a:noFill/>
+        </p:spPr>
+        <p:txBody>
+          <a:bodyPr wrap="square" lIns="45720" rIns="45720" tIns="27432" bIns="27432" anchor="t">
+            <a:spAutoFit/>
+          </a:bodyPr>
+          <a:lstStyle/>
+          <a:p>
+            <a:pPr algn="l">
+              <a:defRPr sz="1550" b="0">
+                <a:solidFill>
+                  <a:srgbClr val="23272F"/>
+                </a:solidFill>
+                <a:latin typeface="Aptos"/>
+              </a:defRPr>
+            </a:pPr>
+            <a:r>
+              <a:t>The Express route, React component, hook, or MongoDB command performs the task.</a:t>
+            </a:r>
+          </a:p>
+        </p:txBody>
+      </p:sp>
+      <p:sp>
+        <p:nvSpPr>
+          <p:cNvPr id="12" name="Rounded Rectangle 11"/>
+          <p:cNvSpPr/>
+          <p:nvPr/>
+        </p:nvSpPr>
+        <p:spPr>
+          <a:xfrm>
+            <a:off x="8183879" y="1417320"/>
+            <a:ext cx="3337560" cy="1920240"/>
+          </a:xfrm>
+          <a:prstGeom prst="roundRect">
+            <a:avLst/>
+          </a:prstGeom>
+          <a:solidFill>
+            <a:srgbClr val="F4F6F9"/>
+          </a:solidFill>
+          <a:ln>
+            <a:solidFill>
+              <a:srgbClr val="DCE1E8"/>
+            </a:solidFill>
+          </a:ln>
+        </p:spPr>
+        <p:style>
+          <a:lnRef idx="1">
+            <a:schemeClr val="accent1"/>
+          </a:lnRef>
+          <a:fillRef idx="3">
+            <a:schemeClr val="accent1"/>
+          </a:fillRef>
+          <a:effectRef idx="2">
+            <a:schemeClr val="accent1"/>
+          </a:effectRef>
+          <a:fontRef idx="minor">
+            <a:schemeClr val="lt1"/>
+          </a:fontRef>
+        </p:style>
+        <p:txBody>
+          <a:bodyPr rtlCol="0" anchor="ctr"/>
+          <a:lstStyle/>
+          <a:p>
+            <a:pPr algn="ctr"/>
+          </a:p>
+        </p:txBody>
+      </p:sp>
+      <p:sp>
+        <p:nvSpPr>
+          <p:cNvPr id="13" name="TextBox 12"/>
+          <p:cNvSpPr txBox="1"/>
+          <p:nvPr/>
+        </p:nvSpPr>
+        <p:spPr>
+          <a:xfrm>
+            <a:off x="8385048" y="1581912"/>
+            <a:ext cx="2935224" cy="365760"/>
+          </a:xfrm>
+          <a:prstGeom prst="rect">
+            <a:avLst/>
+          </a:prstGeom>
+          <a:noFill/>
+        </p:spPr>
+        <p:txBody>
+          <a:bodyPr wrap="square" lIns="45720" rIns="45720" tIns="27432" bIns="27432" anchor="t">
+            <a:spAutoFit/>
+          </a:bodyPr>
+          <a:lstStyle/>
+          <a:p>
+            <a:pPr algn="l">
+              <a:defRPr sz="1800" b="1">
+                <a:solidFill>
+                  <a:srgbClr val="D67E2D"/>
+                </a:solidFill>
+                <a:latin typeface="Aptos"/>
+              </a:defRPr>
+            </a:pPr>
+            <a:r>
+              <a:t>OUTPUT</a:t>
+            </a:r>
+          </a:p>
+        </p:txBody>
+      </p:sp>
+      <p:sp>
+        <p:nvSpPr>
+          <p:cNvPr id="14" name="TextBox 13"/>
+          <p:cNvSpPr txBox="1"/>
+          <p:nvPr/>
+        </p:nvSpPr>
+        <p:spPr>
+          <a:xfrm>
+            <a:off x="8385048" y="2039112"/>
+            <a:ext cx="2935224" cy="1115568"/>
+          </a:xfrm>
+          <a:prstGeom prst="rect">
+            <a:avLst/>
+          </a:prstGeom>
+          <a:noFill/>
+        </p:spPr>
+        <p:txBody>
+          <a:bodyPr wrap="square" lIns="45720" rIns="45720" tIns="27432" bIns="27432" anchor="t">
+            <a:spAutoFit/>
+          </a:bodyPr>
+          <a:lstStyle/>
+          <a:p>
+            <a:pPr algn="l">
+              <a:defRPr sz="1550" b="0">
+                <a:solidFill>
+                  <a:srgbClr val="23272F"/>
+                </a:solidFill>
+                <a:latin typeface="Aptos"/>
+              </a:defRPr>
+            </a:pPr>
+            <a:r>
+              <a:t>Check the browser, terminal, API response, or database result.</a:t>
+            </a:r>
+          </a:p>
+        </p:txBody>
+      </p:sp>
+      <p:sp>
+        <p:nvSpPr>
+          <p:cNvPr id="15" name="TextBox 14"/>
+          <p:cNvSpPr txBox="1"/>
+          <p:nvPr/>
+        </p:nvSpPr>
+        <p:spPr>
+          <a:xfrm>
+            <a:off x="731520" y="3794760"/>
+            <a:ext cx="3657600" cy="411480"/>
+          </a:xfrm>
+          <a:prstGeom prst="rect">
+            <a:avLst/>
+          </a:prstGeom>
+          <a:noFill/>
+        </p:spPr>
+        <p:txBody>
+          <a:bodyPr wrap="square" lIns="45720" rIns="45720" tIns="27432" bIns="27432" anchor="t">
+            <a:spAutoFit/>
+          </a:bodyPr>
+          <a:lstStyle/>
+          <a:p>
+            <a:pPr algn="l">
+              <a:defRPr sz="2200" b="1">
+                <a:solidFill>
+                  <a:srgbClr val="1B2B4B"/>
+                </a:solidFill>
+                <a:latin typeface="Aptos"/>
+              </a:defRPr>
+            </a:pPr>
+            <a:r>
+              <a:t>Verification checklist</a:t>
+            </a:r>
+          </a:p>
+        </p:txBody>
+      </p:sp>
+      <p:sp>
+        <p:nvSpPr>
+          <p:cNvPr id="16" name="TextBox 15"/>
+          <p:cNvSpPr txBox="1"/>
+          <p:nvPr/>
+        </p:nvSpPr>
+        <p:spPr>
+          <a:xfrm>
+            <a:off x="777240" y="4370832"/>
+            <a:ext cx="292608" cy="365760"/>
+          </a:xfrm>
+          <a:prstGeom prst="rect">
+            <a:avLst/>
+          </a:prstGeom>
+          <a:noFill/>
+        </p:spPr>
+        <p:txBody>
+          <a:bodyPr wrap="square" lIns="45720" rIns="45720" tIns="27432" bIns="27432" anchor="t">
+            <a:spAutoFit/>
+          </a:bodyPr>
+          <a:lstStyle/>
+          <a:p>
+            <a:pPr algn="l">
+              <a:defRPr sz="2200" b="1">
+                <a:solidFill>
+                  <a:srgbClr val="305D9C"/>
+                </a:solidFill>
+                <a:latin typeface="Aptos"/>
+              </a:defRPr>
+            </a:pPr>
+            <a:r>
+              <a:t>•</a:t>
+            </a:r>
+          </a:p>
+        </p:txBody>
+      </p:sp>
+      <p:sp>
+        <p:nvSpPr>
+          <p:cNvPr id="17" name="TextBox 16"/>
+          <p:cNvSpPr txBox="1"/>
+          <p:nvPr/>
+        </p:nvSpPr>
+        <p:spPr>
+          <a:xfrm>
+            <a:off x="1115568" y="4361688"/>
+            <a:ext cx="10241280" cy="384048"/>
+          </a:xfrm>
+          <a:prstGeom prst="rect">
+            <a:avLst/>
+          </a:prstGeom>
+          <a:noFill/>
+        </p:spPr>
+        <p:txBody>
+          <a:bodyPr wrap="square" lIns="45720" rIns="45720" tIns="27432" bIns="27432" anchor="t">
+            <a:spAutoFit/>
+          </a:bodyPr>
+          <a:lstStyle/>
+          <a:p>
+            <a:pPr algn="l">
+              <a:defRPr sz="1700" b="0">
+                <a:solidFill>
+                  <a:srgbClr val="23272F"/>
+                </a:solidFill>
+                <a:latin typeface="Aptos"/>
+              </a:defRPr>
+            </a:pPr>
+            <a:r>
+              <a:t>No syntax errors appear in the terminal.</a:t>
+            </a:r>
+          </a:p>
+        </p:txBody>
+      </p:sp>
+      <p:sp>
+        <p:nvSpPr>
+          <p:cNvPr id="18" name="TextBox 17"/>
+          <p:cNvSpPr txBox="1"/>
+          <p:nvPr/>
+        </p:nvSpPr>
+        <p:spPr>
+          <a:xfrm>
+            <a:off x="777240" y="5010912"/>
+            <a:ext cx="292608" cy="365760"/>
+          </a:xfrm>
+          <a:prstGeom prst="rect">
+            <a:avLst/>
+          </a:prstGeom>
+          <a:noFill/>
+        </p:spPr>
+        <p:txBody>
+          <a:bodyPr wrap="square" lIns="45720" rIns="45720" tIns="27432" bIns="27432" anchor="t">
+            <a:spAutoFit/>
+          </a:bodyPr>
+          <a:lstStyle/>
+          <a:p>
+            <a:pPr algn="l">
+              <a:defRPr sz="2200" b="1">
+                <a:solidFill>
+                  <a:srgbClr val="305D9C"/>
+                </a:solidFill>
+                <a:latin typeface="Aptos"/>
+              </a:defRPr>
+            </a:pPr>
+            <a:r>
+              <a:t>•</a:t>
+            </a:r>
+          </a:p>
+        </p:txBody>
+      </p:sp>
+      <p:sp>
+        <p:nvSpPr>
+          <p:cNvPr id="19" name="TextBox 18"/>
+          <p:cNvSpPr txBox="1"/>
+          <p:nvPr/>
+        </p:nvSpPr>
+        <p:spPr>
+          <a:xfrm>
+            <a:off x="1115568" y="5001768"/>
+            <a:ext cx="10241280" cy="384048"/>
+          </a:xfrm>
+          <a:prstGeom prst="rect">
+            <a:avLst/>
+          </a:prstGeom>
+          <a:noFill/>
+        </p:spPr>
+        <p:txBody>
+          <a:bodyPr wrap="square" lIns="45720" rIns="45720" tIns="27432" bIns="27432" anchor="t">
+            <a:spAutoFit/>
+          </a:bodyPr>
+          <a:lstStyle/>
+          <a:p>
+            <a:pPr algn="l">
+              <a:defRPr sz="1700" b="0">
+                <a:solidFill>
+                  <a:srgbClr val="23272F"/>
+                </a:solidFill>
+                <a:latin typeface="Aptos"/>
+              </a:defRPr>
+            </a:pPr>
+            <a:r>
+              <a:t>The requested feature responds to the input.</a:t>
+            </a:r>
+          </a:p>
+        </p:txBody>
+      </p:sp>
+      <p:sp>
+        <p:nvSpPr>
+          <p:cNvPr id="20" name="TextBox 19"/>
+          <p:cNvSpPr txBox="1"/>
+          <p:nvPr/>
+        </p:nvSpPr>
+        <p:spPr>
+          <a:xfrm>
+            <a:off x="777240" y="5650992"/>
+            <a:ext cx="292608" cy="365760"/>
+          </a:xfrm>
+          <a:prstGeom prst="rect">
+            <a:avLst/>
+          </a:prstGeom>
+          <a:noFill/>
+        </p:spPr>
+        <p:txBody>
+          <a:bodyPr wrap="square" lIns="45720" rIns="45720" tIns="27432" bIns="27432" anchor="t">
+            <a:spAutoFit/>
+          </a:bodyPr>
+          <a:lstStyle/>
+          <a:p>
+            <a:pPr algn="l">
+              <a:defRPr sz="2200" b="1">
+                <a:solidFill>
+                  <a:srgbClr val="305D9C"/>
+                </a:solidFill>
+                <a:latin typeface="Aptos"/>
+              </a:defRPr>
+            </a:pPr>
+            <a:r>
+              <a:t>•</a:t>
+            </a:r>
+          </a:p>
+        </p:txBody>
+      </p:sp>
+      <p:sp>
+        <p:nvSpPr>
+          <p:cNvPr id="21" name="TextBox 20"/>
+          <p:cNvSpPr txBox="1"/>
+          <p:nvPr/>
+        </p:nvSpPr>
+        <p:spPr>
+          <a:xfrm>
+            <a:off x="1115568" y="5641848"/>
+            <a:ext cx="10241280" cy="384048"/>
+          </a:xfrm>
+          <a:prstGeom prst="rect">
+            <a:avLst/>
+          </a:prstGeom>
+          <a:noFill/>
+        </p:spPr>
+        <p:txBody>
+          <a:bodyPr wrap="square" lIns="45720" rIns="45720" tIns="27432" bIns="27432" anchor="t">
+            <a:spAutoFit/>
+          </a:bodyPr>
+          <a:lstStyle/>
+          <a:p>
+            <a:pPr algn="l">
+              <a:defRPr sz="1700" b="0">
+                <a:solidFill>
+                  <a:srgbClr val="23272F"/>
+                </a:solidFill>
+                <a:latin typeface="Aptos"/>
+              </a:defRPr>
+            </a:pPr>
+            <a:r>
+              <a:t>The displayed / returned value matches the operation.</a:t>
+            </a:r>
+          </a:p>
+        </p:txBody>
+      </p:sp>
+    </p:spTree>
+  </p:cSld>
+  <p:clrMapOvr>
+    <a:masterClrMapping/>
+  </p:clrMapOvr>
+</p:sld>
+</file>
+
+<file path=ppt/slides/slide8.xml><?xml version="1.0" encoding="utf-8"?>
+<p:sld xmlns:a="http://schemas.openxmlformats.org/drawingml/2006/main" xmlns:p="http://schemas.openxmlformats.org/presentationml/2006/main" xmlns:r="http://schemas.openxmlformats.org/officeDocument/2006/relationships">
+  <p:cSld>
+    <p:spTree>
+      <p:nvGrpSpPr>
+        <p:cNvPr id="1" name=""/>
+        <p:cNvGrpSpPr/>
+        <p:nvPr/>
+      </p:nvGrpSpPr>
+      <p:grpSpPr/>
+      <p:sp>
+        <p:nvSpPr>
+          <p:cNvPr id="2" name="Rectangle 1"/>
+          <p:cNvSpPr/>
+          <p:nvPr/>
+        </p:nvSpPr>
+        <p:spPr>
+          <a:xfrm>
+            <a:off x="0" y="0"/>
+            <a:ext cx="12191695" cy="6858000"/>
+          </a:xfrm>
+          <a:prstGeom prst="rect">
+            <a:avLst/>
+          </a:prstGeom>
+          <a:solidFill>
+            <a:srgbClr val="FFFFFF"/>
+          </a:solidFill>
+          <a:ln>
+            <a:noFill/>
+          </a:ln>
+        </p:spPr>
+        <p:style>
+          <a:lnRef idx="1">
+            <a:schemeClr val="accent1"/>
+          </a:lnRef>
+          <a:fillRef idx="3">
+            <a:schemeClr val="accent1"/>
+          </a:fillRef>
+          <a:effectRef idx="2">
+            <a:schemeClr val="accent1"/>
+          </a:effectRef>
+          <a:fontRef idx="minor">
+            <a:schemeClr val="lt1"/>
+          </a:fontRef>
+        </p:style>
+        <p:txBody>
+          <a:bodyPr rtlCol="0" anchor="ctr"/>
+          <a:lstStyle/>
+          <a:p>
+            <a:pPr algn="ctr"/>
+          </a:p>
+        </p:txBody>
+      </p:sp>
+      <p:sp>
+        <p:nvSpPr>
+          <p:cNvPr id="3" name="TextBox 2"/>
+          <p:cNvSpPr txBox="1"/>
+          <p:nvPr/>
+        </p:nvSpPr>
+        <p:spPr>
+          <a:xfrm>
+            <a:off x="594360" y="274320"/>
+            <a:ext cx="10927080" cy="621792"/>
+          </a:xfrm>
+          <a:prstGeom prst="rect">
+            <a:avLst/>
+          </a:prstGeom>
+          <a:noFill/>
+        </p:spPr>
+        <p:txBody>
+          <a:bodyPr wrap="square" lIns="45720" rIns="45720" tIns="27432" bIns="27432" anchor="ctr">
+            <a:spAutoFit/>
+          </a:bodyPr>
+          <a:lstStyle/>
+          <a:p>
+            <a:pPr algn="l">
+              <a:defRPr sz="2700" b="1">
+                <a:solidFill>
+                  <a:srgbClr val="1B2B4B"/>
+                </a:solidFill>
+                <a:latin typeface="Aptos"/>
+              </a:defRPr>
+            </a:pPr>
+            <a:r>
+              <a:t>Viva preparation</a:t>
+            </a:r>
+          </a:p>
+        </p:txBody>
+      </p:sp>
+      <p:sp>
+        <p:nvSpPr>
+          <p:cNvPr id="4" name="Rectangle 3"/>
+          <p:cNvSpPr/>
+          <p:nvPr/>
+        </p:nvSpPr>
+        <p:spPr>
+          <a:xfrm>
+            <a:off x="594360" y="950976"/>
+            <a:ext cx="1143000" cy="54864"/>
+          </a:xfrm>
+          <a:prstGeom prst="rect">
+            <a:avLst/>
+          </a:prstGeom>
+          <a:solidFill>
+            <a:srgbClr val="305D9C"/>
+          </a:solidFill>
+          <a:ln>
+            <a:noFill/>
+          </a:ln>
+        </p:spPr>
+        <p:style>
+          <a:lnRef idx="1">
+            <a:schemeClr val="accent1"/>
+          </a:lnRef>
+          <a:fillRef idx="3">
+            <a:schemeClr val="accent1"/>
+          </a:fillRef>
+          <a:effectRef idx="2">
+            <a:schemeClr val="accent1"/>
+          </a:effectRef>
+          <a:fontRef idx="minor">
+            <a:schemeClr val="lt1"/>
+          </a:fontRef>
+        </p:style>
+        <p:txBody>
+          <a:bodyPr rtlCol="0" anchor="ctr"/>
+          <a:lstStyle/>
+          <a:p>
+            <a:pPr algn="ctr"/>
+          </a:p>
+        </p:txBody>
+      </p:sp>
+      <p:sp>
+        <p:nvSpPr>
+          <p:cNvPr id="5" name="TextBox 4"/>
+          <p:cNvSpPr txBox="1"/>
+          <p:nvPr/>
+        </p:nvSpPr>
+        <p:spPr>
+          <a:xfrm>
+            <a:off x="777240" y="1417320"/>
+            <a:ext cx="292608" cy="365760"/>
+          </a:xfrm>
+          <a:prstGeom prst="rect">
+            <a:avLst/>
+          </a:prstGeom>
+          <a:noFill/>
+        </p:spPr>
+        <p:txBody>
+          <a:bodyPr wrap="square" lIns="45720" rIns="45720" tIns="27432" bIns="27432" anchor="t">
+            <a:spAutoFit/>
+          </a:bodyPr>
+          <a:lstStyle/>
+          <a:p>
+            <a:pPr algn="l">
+              <a:defRPr sz="2200" b="1">
+                <a:solidFill>
+                  <a:srgbClr val="305D9C"/>
+                </a:solidFill>
+                <a:latin typeface="Aptos"/>
+              </a:defRPr>
+            </a:pPr>
+            <a:r>
+              <a:t>•</a:t>
+            </a:r>
+          </a:p>
+        </p:txBody>
+      </p:sp>
+      <p:sp>
+        <p:nvSpPr>
+          <p:cNvPr id="6" name="TextBox 5"/>
+          <p:cNvSpPr txBox="1"/>
+          <p:nvPr/>
+        </p:nvSpPr>
+        <p:spPr>
+          <a:xfrm>
+            <a:off x="1115568" y="1408176"/>
+            <a:ext cx="10241280" cy="384048"/>
+          </a:xfrm>
+          <a:prstGeom prst="rect">
+            <a:avLst/>
+          </a:prstGeom>
+          <a:noFill/>
+        </p:spPr>
+        <p:txBody>
+          <a:bodyPr wrap="square" lIns="45720" rIns="45720" tIns="27432" bIns="27432" anchor="t">
+            <a:spAutoFit/>
+          </a:bodyPr>
+          <a:lstStyle/>
+          <a:p>
+            <a:pPr algn="l">
+              <a:defRPr sz="1800" b="0">
+                <a:solidFill>
+                  <a:srgbClr val="23272F"/>
+                </a:solidFill>
+                <a:latin typeface="Aptos"/>
+              </a:defRPr>
+            </a:pPr>
+            <a:r>
+              <a:t>What is the purpose of this experiment?</a:t>
+            </a:r>
+          </a:p>
+        </p:txBody>
+      </p:sp>
+      <p:sp>
+        <p:nvSpPr>
+          <p:cNvPr id="7" name="TextBox 6"/>
+          <p:cNvSpPr txBox="1"/>
+          <p:nvPr/>
+        </p:nvSpPr>
+        <p:spPr>
+          <a:xfrm>
+            <a:off x="777240" y="2057400"/>
+            <a:ext cx="292608" cy="365760"/>
+          </a:xfrm>
+          <a:prstGeom prst="rect">
+            <a:avLst/>
+          </a:prstGeom>
+          <a:noFill/>
+        </p:spPr>
+        <p:txBody>
+          <a:bodyPr wrap="square" lIns="45720" rIns="45720" tIns="27432" bIns="27432" anchor="t">
+            <a:spAutoFit/>
+          </a:bodyPr>
+          <a:lstStyle/>
+          <a:p>
+            <a:pPr algn="l">
+              <a:defRPr sz="2200" b="1">
+                <a:solidFill>
+                  <a:srgbClr val="305D9C"/>
+                </a:solidFill>
+                <a:latin typeface="Aptos"/>
+              </a:defRPr>
+            </a:pPr>
+            <a:r>
+              <a:t>•</a:t>
+            </a:r>
+          </a:p>
+        </p:txBody>
+      </p:sp>
+      <p:sp>
+        <p:nvSpPr>
+          <p:cNvPr id="8" name="TextBox 7"/>
+          <p:cNvSpPr txBox="1"/>
+          <p:nvPr/>
+        </p:nvSpPr>
+        <p:spPr>
+          <a:xfrm>
+            <a:off x="1115568" y="2048256"/>
+            <a:ext cx="10241280" cy="384048"/>
+          </a:xfrm>
+          <a:prstGeom prst="rect">
+            <a:avLst/>
+          </a:prstGeom>
+          <a:noFill/>
+        </p:spPr>
+        <p:txBody>
+          <a:bodyPr wrap="square" lIns="45720" rIns="45720" tIns="27432" bIns="27432" anchor="t">
+            <a:spAutoFit/>
+          </a:bodyPr>
+          <a:lstStyle/>
+          <a:p>
+            <a:pPr algn="l">
+              <a:defRPr sz="1800" b="0">
+                <a:solidFill>
+                  <a:srgbClr val="23272F"/>
+                </a:solidFill>
+                <a:latin typeface="Aptos"/>
+              </a:defRPr>
+            </a:pPr>
+            <a:r>
+              <a:t>Which input is required?</a:t>
+            </a:r>
+          </a:p>
+        </p:txBody>
+      </p:sp>
+      <p:sp>
+        <p:nvSpPr>
+          <p:cNvPr id="9" name="TextBox 8"/>
+          <p:cNvSpPr txBox="1"/>
+          <p:nvPr/>
+        </p:nvSpPr>
+        <p:spPr>
+          <a:xfrm>
+            <a:off x="777240" y="2697480"/>
+            <a:ext cx="292608" cy="365760"/>
+          </a:xfrm>
+          <a:prstGeom prst="rect">
+            <a:avLst/>
+          </a:prstGeom>
+          <a:noFill/>
+        </p:spPr>
+        <p:txBody>
+          <a:bodyPr wrap="square" lIns="45720" rIns="45720" tIns="27432" bIns="27432" anchor="t">
+            <a:spAutoFit/>
+          </a:bodyPr>
+          <a:lstStyle/>
+          <a:p>
+            <a:pPr algn="l">
+              <a:defRPr sz="2200" b="1">
+                <a:solidFill>
+                  <a:srgbClr val="305D9C"/>
+                </a:solidFill>
+                <a:latin typeface="Aptos"/>
+              </a:defRPr>
+            </a:pPr>
+            <a:r>
+              <a:t>•</a:t>
+            </a:r>
+          </a:p>
+        </p:txBody>
+      </p:sp>
+      <p:sp>
+        <p:nvSpPr>
+          <p:cNvPr id="10" name="TextBox 9"/>
+          <p:cNvSpPr txBox="1"/>
+          <p:nvPr/>
+        </p:nvSpPr>
+        <p:spPr>
+          <a:xfrm>
+            <a:off x="1115568" y="2688336"/>
+            <a:ext cx="10241280" cy="384048"/>
+          </a:xfrm>
+          <a:prstGeom prst="rect">
+            <a:avLst/>
+          </a:prstGeom>
+          <a:noFill/>
+        </p:spPr>
+        <p:txBody>
+          <a:bodyPr wrap="square" lIns="45720" rIns="45720" tIns="27432" bIns="27432" anchor="t">
+            <a:spAutoFit/>
+          </a:bodyPr>
+          <a:lstStyle/>
+          <a:p>
+            <a:pPr algn="l">
+              <a:defRPr sz="1800" b="0">
+                <a:solidFill>
+                  <a:srgbClr val="23272F"/>
+                </a:solidFill>
+                <a:latin typeface="Aptos"/>
+              </a:defRPr>
+            </a:pPr>
+            <a:r>
+              <a:t>Which line or command performs the main operation?</a:t>
+            </a:r>
+          </a:p>
+        </p:txBody>
+      </p:sp>
+      <p:sp>
+        <p:nvSpPr>
+          <p:cNvPr id="11" name="TextBox 10"/>
+          <p:cNvSpPr txBox="1"/>
+          <p:nvPr/>
+        </p:nvSpPr>
+        <p:spPr>
+          <a:xfrm>
+            <a:off x="777240" y="3337560"/>
+            <a:ext cx="292608" cy="365760"/>
+          </a:xfrm>
+          <a:prstGeom prst="rect">
+            <a:avLst/>
+          </a:prstGeom>
+          <a:noFill/>
+        </p:spPr>
+        <p:txBody>
+          <a:bodyPr wrap="square" lIns="45720" rIns="45720" tIns="27432" bIns="27432" anchor="t">
+            <a:spAutoFit/>
+          </a:bodyPr>
+          <a:lstStyle/>
+          <a:p>
+            <a:pPr algn="l">
+              <a:defRPr sz="2200" b="1">
+                <a:solidFill>
+                  <a:srgbClr val="305D9C"/>
+                </a:solidFill>
+                <a:latin typeface="Aptos"/>
+              </a:defRPr>
+            </a:pPr>
+            <a:r>
+              <a:t>•</a:t>
+            </a:r>
+          </a:p>
+        </p:txBody>
+      </p:sp>
+      <p:sp>
+        <p:nvSpPr>
+          <p:cNvPr id="12" name="TextBox 11"/>
+          <p:cNvSpPr txBox="1"/>
+          <p:nvPr/>
+        </p:nvSpPr>
+        <p:spPr>
+          <a:xfrm>
+            <a:off x="1115568" y="3328416"/>
+            <a:ext cx="10241280" cy="384048"/>
+          </a:xfrm>
+          <a:prstGeom prst="rect">
+            <a:avLst/>
+          </a:prstGeom>
+          <a:noFill/>
+        </p:spPr>
+        <p:txBody>
+          <a:bodyPr wrap="square" lIns="45720" rIns="45720" tIns="27432" bIns="27432" anchor="t">
+            <a:spAutoFit/>
+          </a:bodyPr>
+          <a:lstStyle/>
+          <a:p>
+            <a:pPr algn="l">
+              <a:defRPr sz="1800" b="0">
+                <a:solidFill>
+                  <a:srgbClr val="23272F"/>
+                </a:solidFill>
+                <a:latin typeface="Aptos"/>
+              </a:defRPr>
+            </a:pPr>
+            <a:r>
+              <a:t>What output should you observe?</a:t>
+            </a:r>
+          </a:p>
+        </p:txBody>
+      </p:sp>
+      <p:sp>
+        <p:nvSpPr>
+          <p:cNvPr id="13" name="TextBox 12"/>
+          <p:cNvSpPr txBox="1"/>
+          <p:nvPr/>
+        </p:nvSpPr>
+        <p:spPr>
+          <a:xfrm>
+            <a:off x="777240" y="3977640"/>
+            <a:ext cx="292608" cy="365760"/>
+          </a:xfrm>
+          <a:prstGeom prst="rect">
+            <a:avLst/>
+          </a:prstGeom>
+          <a:noFill/>
+        </p:spPr>
+        <p:txBody>
+          <a:bodyPr wrap="square" lIns="45720" rIns="45720" tIns="27432" bIns="27432" anchor="t">
+            <a:spAutoFit/>
+          </a:bodyPr>
+          <a:lstStyle/>
+          <a:p>
+            <a:pPr algn="l">
+              <a:defRPr sz="2200" b="1">
+                <a:solidFill>
+                  <a:srgbClr val="305D9C"/>
+                </a:solidFill>
+                <a:latin typeface="Aptos"/>
+              </a:defRPr>
+            </a:pPr>
+            <a:r>
+              <a:t>•</a:t>
+            </a:r>
+          </a:p>
+        </p:txBody>
+      </p:sp>
+      <p:sp>
+        <p:nvSpPr>
+          <p:cNvPr id="14" name="TextBox 13"/>
+          <p:cNvSpPr txBox="1"/>
+          <p:nvPr/>
+        </p:nvSpPr>
+        <p:spPr>
+          <a:xfrm>
+            <a:off x="1115568" y="3968496"/>
+            <a:ext cx="10241280" cy="384048"/>
+          </a:xfrm>
+          <a:prstGeom prst="rect">
+            <a:avLst/>
+          </a:prstGeom>
+          <a:noFill/>
+        </p:spPr>
+        <p:txBody>
+          <a:bodyPr wrap="square" lIns="45720" rIns="45720" tIns="27432" bIns="27432" anchor="t">
+            <a:spAutoFit/>
+          </a:bodyPr>
+          <a:lstStyle/>
+          <a:p>
+            <a:pPr algn="l">
+              <a:defRPr sz="1800" b="0">
+                <a:solidFill>
+                  <a:srgbClr val="23272F"/>
+                </a:solidFill>
+                <a:latin typeface="Aptos"/>
+              </a:defRPr>
+            </a:pPr>
+            <a:r>
+              <a:t>What happens when the input changes?</a:t>
             </a:r>
           </a:p>
         </p:txBody>
